--- a/slides/APL_Bootcamp-part-5.pptx
+++ b/slides/APL_Bootcamp-part-5.pptx
@@ -5,10 +5,10 @@
     <p:sldMasterId id="2147483648" r:id="rId1"/>
   </p:sldMasterIdLst>
   <p:notesMasterIdLst>
-    <p:notesMasterId r:id="rId119"/>
+    <p:notesMasterId r:id="rId120"/>
   </p:notesMasterIdLst>
   <p:handoutMasterIdLst>
-    <p:handoutMasterId r:id="rId120"/>
+    <p:handoutMasterId r:id="rId121"/>
   </p:handoutMasterIdLst>
   <p:sldIdLst>
     <p:sldId id="257" r:id="rId2"/>
@@ -110,42 +110,43 @@
     <p:sldId id="846" r:id="rId98"/>
     <p:sldId id="847" r:id="rId99"/>
     <p:sldId id="1044" r:id="rId100"/>
-    <p:sldId id="842" r:id="rId101"/>
-    <p:sldId id="901" r:id="rId102"/>
-    <p:sldId id="902" r:id="rId103"/>
-    <p:sldId id="903" r:id="rId104"/>
-    <p:sldId id="900" r:id="rId105"/>
-    <p:sldId id="843" r:id="rId106"/>
-    <p:sldId id="844" r:id="rId107"/>
-    <p:sldId id="845" r:id="rId108"/>
-    <p:sldId id="853" r:id="rId109"/>
-    <p:sldId id="889" r:id="rId110"/>
-    <p:sldId id="890" r:id="rId111"/>
-    <p:sldId id="891" r:id="rId112"/>
-    <p:sldId id="892" r:id="rId113"/>
-    <p:sldId id="893" r:id="rId114"/>
-    <p:sldId id="894" r:id="rId115"/>
-    <p:sldId id="895" r:id="rId116"/>
-    <p:sldId id="793" r:id="rId117"/>
-    <p:sldId id="896" r:id="rId118"/>
+    <p:sldId id="1047" r:id="rId101"/>
+    <p:sldId id="842" r:id="rId102"/>
+    <p:sldId id="901" r:id="rId103"/>
+    <p:sldId id="902" r:id="rId104"/>
+    <p:sldId id="903" r:id="rId105"/>
+    <p:sldId id="900" r:id="rId106"/>
+    <p:sldId id="843" r:id="rId107"/>
+    <p:sldId id="844" r:id="rId108"/>
+    <p:sldId id="845" r:id="rId109"/>
+    <p:sldId id="853" r:id="rId110"/>
+    <p:sldId id="889" r:id="rId111"/>
+    <p:sldId id="890" r:id="rId112"/>
+    <p:sldId id="891" r:id="rId113"/>
+    <p:sldId id="892" r:id="rId114"/>
+    <p:sldId id="893" r:id="rId115"/>
+    <p:sldId id="894" r:id="rId116"/>
+    <p:sldId id="895" r:id="rId117"/>
+    <p:sldId id="793" r:id="rId118"/>
+    <p:sldId id="896" r:id="rId119"/>
   </p:sldIdLst>
   <p:sldSz cx="9144000" cy="5143500" type="screen16x9"/>
   <p:notesSz cx="6858000" cy="9144000"/>
   <p:embeddedFontLst>
     <p:embeddedFont>
       <p:font typeface="APL385 Unicode" panose="020B0709000202000203" pitchFamily="49" charset="0"/>
-      <p:regular r:id="rId121"/>
+      <p:regular r:id="rId122"/>
     </p:embeddedFont>
     <p:embeddedFont>
       <p:font typeface="Sarabun" panose="00000500000000000000" pitchFamily="2" charset="-34"/>
-      <p:regular r:id="rId122"/>
-      <p:bold r:id="rId123"/>
-      <p:italic r:id="rId124"/>
-      <p:boldItalic r:id="rId125"/>
+      <p:regular r:id="rId123"/>
+      <p:bold r:id="rId124"/>
+      <p:italic r:id="rId125"/>
+      <p:boldItalic r:id="rId126"/>
     </p:embeddedFont>
     <p:embeddedFont>
       <p:font typeface="Wingdings 2" panose="05020102010507070707" pitchFamily="18" charset="2"/>
-      <p:regular r:id="rId126"/>
+      <p:regular r:id="rId127"/>
     </p:embeddedFont>
   </p:embeddedFontLst>
   <p:defaultTextStyle>
@@ -362,7 +363,7 @@
               <a:rPr lang="en-GB" smtClean="0">
                 <a:latin typeface="Sarabun" panose="00000500000000000000" pitchFamily="2" charset="-34"/>
               </a:rPr>
-              <a:t>12/08/2025</a:t>
+              <a:t>20/08/2025</a:t>
             </a:fld>
             <a:endParaRPr lang="en-GB" dirty="0">
               <a:latin typeface="Sarabun" panose="00000500000000000000" pitchFamily="2" charset="-34"/>
@@ -540,7 +541,7 @@
             <a:fld id="{CDEAEF8A-5BB8-41C8-B8C2-160617C17EF4}" type="datetimeFigureOut">
               <a:rPr lang="en-GB" smtClean="0"/>
               <a:pPr/>
-              <a:t>12/08/2025</a:t>
+              <a:t>20/08/2025</a:t>
             </a:fld>
             <a:endParaRPr lang="en-GB" dirty="0"/>
           </a:p>
@@ -3479,6 +3480,472 @@
   <p:cSld>
     <p:spTree>
       <p:nvGrpSpPr>
+        <p:cNvPr id="1" name="">
+          <a:extLst>
+            <a:ext uri="{FF2B5EF4-FFF2-40B4-BE49-F238E27FC236}">
+              <a16:creationId xmlns:a16="http://schemas.microsoft.com/office/drawing/2014/main" id="{F5338E7D-8072-F194-FFD6-3DCCEF91CB96}"/>
+            </a:ext>
+          </a:extLst>
+        </p:cNvPr>
+        <p:cNvGrpSpPr/>
+        <p:nvPr/>
+      </p:nvGrpSpPr>
+      <p:grpSpPr>
+        <a:xfrm>
+          <a:off x="0" y="0"/>
+          <a:ext cx="0" cy="0"/>
+          <a:chOff x="0" y="0"/>
+          <a:chExt cx="0" cy="0"/>
+        </a:xfrm>
+      </p:grpSpPr>
+      <p:sp>
+        <p:nvSpPr>
+          <p:cNvPr id="2" name="Content Placeholder 1">
+            <a:extLst>
+              <a:ext uri="{FF2B5EF4-FFF2-40B4-BE49-F238E27FC236}">
+                <a16:creationId xmlns:a16="http://schemas.microsoft.com/office/drawing/2014/main" id="{0632C207-BE01-0E56-473C-C574024251C5}"/>
+              </a:ext>
+            </a:extLst>
+          </p:cNvPr>
+          <p:cNvSpPr>
+            <a:spLocks noGrp="1"/>
+          </p:cNvSpPr>
+          <p:nvPr>
+            <p:ph idx="1"/>
+          </p:nvPr>
+        </p:nvSpPr>
+        <p:spPr/>
+        <p:txBody>
+          <a:bodyPr/>
+          <a:lstStyle/>
+          <a:p>
+            <a:pPr marL="0" indent="0">
+              <a:buNone/>
+            </a:pPr>
+            <a:r>
+              <a:rPr lang="en-GB" dirty="0">
+                <a:solidFill>
+                  <a:srgbClr val="00B050"/>
+                </a:solidFill>
+                <a:latin typeface="APL385 Unicode" panose="020B0709000202000203" pitchFamily="49" charset="0"/>
+              </a:rPr>
+              <a:t>      </a:t>
+            </a:r>
+            <a:r>
+              <a:rPr lang="en-GB" dirty="0" err="1">
+                <a:solidFill>
+                  <a:srgbClr val="00B050"/>
+                </a:solidFill>
+                <a:latin typeface="APL385 Unicode" panose="020B0709000202000203" pitchFamily="49" charset="0"/>
+              </a:rPr>
+              <a:t>s←'switch</a:t>
+            </a:r>
+            <a:r>
+              <a:rPr lang="en-GB" dirty="0">
+                <a:solidFill>
+                  <a:srgbClr val="00B050"/>
+                </a:solidFill>
+                <a:latin typeface="APL385 Unicode" panose="020B0709000202000203" pitchFamily="49" charset="0"/>
+              </a:rPr>
+              <a:t> </a:t>
+            </a:r>
+            <a:r>
+              <a:rPr lang="en-GB" dirty="0" err="1">
+                <a:solidFill>
+                  <a:srgbClr val="00B050"/>
+                </a:solidFill>
+                <a:latin typeface="APL385 Unicode" panose="020B0709000202000203" pitchFamily="49" charset="0"/>
+              </a:rPr>
+              <a:t>i</a:t>
+            </a:r>
+            <a:r>
+              <a:rPr lang="en-GB" dirty="0">
+                <a:solidFill>
+                  <a:srgbClr val="00B050"/>
+                </a:solidFill>
+                <a:latin typeface="APL385 Unicode" panose="020B0709000202000203" pitchFamily="49" charset="0"/>
+              </a:rPr>
+              <a:t>'</a:t>
+            </a:r>
+          </a:p>
+          <a:p>
+            <a:pPr marL="0" indent="0">
+              <a:buNone/>
+            </a:pPr>
+            <a:r>
+              <a:rPr lang="en-GB" dirty="0">
+                <a:solidFill>
+                  <a:srgbClr val="00B050"/>
+                </a:solidFill>
+                <a:latin typeface="APL385 Unicode" panose="020B0709000202000203" pitchFamily="49" charset="0"/>
+              </a:rPr>
+              <a:t>      ('!',s)[('</a:t>
+            </a:r>
+            <a:r>
+              <a:rPr lang="en-GB" dirty="0" err="1">
+                <a:solidFill>
+                  <a:srgbClr val="00B050"/>
+                </a:solidFill>
+                <a:latin typeface="APL385 Unicode" panose="020B0709000202000203" pitchFamily="49" charset="0"/>
+              </a:rPr>
+              <a:t>i</a:t>
+            </a:r>
+            <a:r>
+              <a:rPr lang="en-GB" dirty="0">
+                <a:solidFill>
+                  <a:srgbClr val="00B050"/>
+                </a:solidFill>
+                <a:latin typeface="APL385 Unicode" panose="020B0709000202000203" pitchFamily="49" charset="0"/>
+              </a:rPr>
+              <a:t>',s)⍳s]</a:t>
+            </a:r>
+          </a:p>
+          <a:p>
+            <a:pPr marL="0" indent="0">
+              <a:buNone/>
+            </a:pPr>
+            <a:r>
+              <a:rPr lang="en-GB" dirty="0" err="1">
+                <a:latin typeface="APL385 Unicode" panose="020B0709000202000203" pitchFamily="49" charset="0"/>
+              </a:rPr>
+              <a:t>sw!tch</a:t>
+            </a:r>
+            <a:r>
+              <a:rPr lang="en-GB" dirty="0">
+                <a:latin typeface="APL385 Unicode" panose="020B0709000202000203" pitchFamily="49" charset="0"/>
+              </a:rPr>
+              <a:t> !</a:t>
+            </a:r>
+          </a:p>
+          <a:p>
+            <a:pPr marL="0" indent="0">
+              <a:buNone/>
+            </a:pPr>
+            <a:r>
+              <a:rPr lang="en-GB" dirty="0">
+                <a:solidFill>
+                  <a:srgbClr val="00B050"/>
+                </a:solidFill>
+                <a:latin typeface="APL385 Unicode" panose="020B0709000202000203" pitchFamily="49" charset="0"/>
+              </a:rPr>
+              <a:t>      </a:t>
+            </a:r>
+            <a:r>
+              <a:rPr lang="en-GB" dirty="0" err="1">
+                <a:solidFill>
+                  <a:srgbClr val="00B050"/>
+                </a:solidFill>
+                <a:latin typeface="APL385 Unicode" panose="020B0709000202000203" pitchFamily="49" charset="0"/>
+              </a:rPr>
+              <a:t>s←'cap</a:t>
+            </a:r>
+            <a:r>
+              <a:rPr lang="en-GB" dirty="0">
+                <a:solidFill>
+                  <a:srgbClr val="00B050"/>
+                </a:solidFill>
+                <a:latin typeface="APL385 Unicode" panose="020B0709000202000203" pitchFamily="49" charset="0"/>
+              </a:rPr>
+              <a:t> vowels'</a:t>
+            </a:r>
+          </a:p>
+          <a:p>
+            <a:pPr marL="0" indent="0">
+              <a:buNone/>
+            </a:pPr>
+            <a:r>
+              <a:rPr lang="en-GB" dirty="0">
+                <a:solidFill>
+                  <a:srgbClr val="00B050"/>
+                </a:solidFill>
+                <a:latin typeface="APL385 Unicode" panose="020B0709000202000203" pitchFamily="49" charset="0"/>
+              </a:rPr>
+              <a:t>      ('AEIOU',s)[('</a:t>
+            </a:r>
+            <a:r>
+              <a:rPr lang="en-GB" dirty="0" err="1">
+                <a:solidFill>
+                  <a:srgbClr val="00B050"/>
+                </a:solidFill>
+                <a:latin typeface="APL385 Unicode" panose="020B0709000202000203" pitchFamily="49" charset="0"/>
+              </a:rPr>
+              <a:t>aeiou</a:t>
+            </a:r>
+            <a:r>
+              <a:rPr lang="en-GB" dirty="0">
+                <a:solidFill>
+                  <a:srgbClr val="00B050"/>
+                </a:solidFill>
+                <a:latin typeface="APL385 Unicode" panose="020B0709000202000203" pitchFamily="49" charset="0"/>
+              </a:rPr>
+              <a:t>',s)⍳s]</a:t>
+            </a:r>
+          </a:p>
+          <a:p>
+            <a:pPr marL="0" indent="0">
+              <a:buNone/>
+            </a:pPr>
+            <a:r>
+              <a:rPr lang="en-GB" dirty="0" err="1">
+                <a:latin typeface="APL385 Unicode" panose="020B0709000202000203" pitchFamily="49" charset="0"/>
+              </a:rPr>
+              <a:t>cAp</a:t>
+            </a:r>
+            <a:r>
+              <a:rPr lang="en-GB" dirty="0">
+                <a:latin typeface="APL385 Unicode" panose="020B0709000202000203" pitchFamily="49" charset="0"/>
+              </a:rPr>
+              <a:t> </a:t>
+            </a:r>
+            <a:r>
+              <a:rPr lang="en-GB" dirty="0" err="1">
+                <a:latin typeface="APL385 Unicode" panose="020B0709000202000203" pitchFamily="49" charset="0"/>
+              </a:rPr>
+              <a:t>vOwEls</a:t>
+            </a:r>
+            <a:endParaRPr lang="en-GB" dirty="0">
+              <a:latin typeface="APL385 Unicode" panose="020B0709000202000203" pitchFamily="49" charset="0"/>
+            </a:endParaRPr>
+          </a:p>
+        </p:txBody>
+      </p:sp>
+      <p:sp>
+        <p:nvSpPr>
+          <p:cNvPr id="3" name="Title 2">
+            <a:extLst>
+              <a:ext uri="{FF2B5EF4-FFF2-40B4-BE49-F238E27FC236}">
+                <a16:creationId xmlns:a16="http://schemas.microsoft.com/office/drawing/2014/main" id="{637C7EAF-1D2F-B6E6-9E87-E39A94135D06}"/>
+              </a:ext>
+            </a:extLst>
+          </p:cNvPr>
+          <p:cNvSpPr>
+            <a:spLocks noGrp="1"/>
+          </p:cNvSpPr>
+          <p:nvPr>
+            <p:ph type="title"/>
+          </p:nvPr>
+        </p:nvSpPr>
+        <p:spPr/>
+        <p:txBody>
+          <a:bodyPr/>
+          <a:lstStyle/>
+          <a:p>
+            <a:r>
+              <a:rPr lang="en-GB" dirty="0"/>
+              <a:t>Index Of (</a:t>
+            </a:r>
+            <a:r>
+              <a:rPr lang="en-GB" dirty="0">
+                <a:latin typeface="APL385 Unicode" panose="020B0709000202000203" pitchFamily="49" charset="0"/>
+              </a:rPr>
+              <a:t>⍺</a:t>
+            </a:r>
+            <a:r>
+              <a:rPr lang="en-GB" dirty="0">
+                <a:solidFill>
+                  <a:srgbClr val="FF6600"/>
+                </a:solidFill>
+                <a:latin typeface="APL385 Unicode" panose="020B0709000202000203" pitchFamily="49" charset="0"/>
+              </a:rPr>
+              <a:t>⍳</a:t>
+            </a:r>
+            <a:r>
+              <a:rPr lang="en-GB" dirty="0">
+                <a:latin typeface="APL385 Unicode" panose="020B0709000202000203" pitchFamily="49" charset="0"/>
+              </a:rPr>
+              <a:t>⍵</a:t>
+            </a:r>
+            <a:r>
+              <a:rPr lang="en-GB" dirty="0"/>
+              <a:t>)</a:t>
+            </a:r>
+          </a:p>
+        </p:txBody>
+      </p:sp>
+      <p:sp>
+        <p:nvSpPr>
+          <p:cNvPr id="4" name="Media Placeholder 3">
+            <a:extLst>
+              <a:ext uri="{FF2B5EF4-FFF2-40B4-BE49-F238E27FC236}">
+                <a16:creationId xmlns:a16="http://schemas.microsoft.com/office/drawing/2014/main" id="{1BA2B5FC-5F21-5A88-7558-E202E0505A0F}"/>
+              </a:ext>
+            </a:extLst>
+          </p:cNvPr>
+          <p:cNvSpPr>
+            <a:spLocks noGrp="1"/>
+          </p:cNvSpPr>
+          <p:nvPr>
+            <p:ph type="media" sz="quarter" idx="11"/>
+          </p:nvPr>
+        </p:nvSpPr>
+        <p:spPr/>
+        <p:txBody>
+          <a:bodyPr/>
+          <a:lstStyle/>
+          <a:p>
+            <a:endParaRPr lang="en-GB"/>
+          </a:p>
+        </p:txBody>
+      </p:sp>
+    </p:spTree>
+    <p:extLst>
+      <p:ext uri="{BB962C8B-B14F-4D97-AF65-F5344CB8AC3E}">
+        <p14:creationId xmlns:p14="http://schemas.microsoft.com/office/powerpoint/2010/main" val="3903223609"/>
+      </p:ext>
+    </p:extLst>
+  </p:cSld>
+  <p:clrMapOvr>
+    <a:masterClrMapping/>
+  </p:clrMapOvr>
+  <p:timing>
+    <p:tnLst>
+      <p:par>
+        <p:cTn id="1" dur="indefinite" restart="never" nodeType="tmRoot">
+          <p:childTnLst>
+            <p:seq concurrent="1" nextAc="seek">
+              <p:cTn id="2" dur="indefinite" nodeType="mainSeq">
+                <p:childTnLst>
+                  <p:par>
+                    <p:cTn id="3" fill="hold">
+                      <p:stCondLst>
+                        <p:cond delay="indefinite"/>
+                      </p:stCondLst>
+                      <p:childTnLst>
+                        <p:par>
+                          <p:cTn id="4" fill="hold">
+                            <p:stCondLst>
+                              <p:cond delay="0"/>
+                            </p:stCondLst>
+                            <p:childTnLst>
+                              <p:par>
+                                <p:cTn id="5" presetID="1" presetClass="entr" presetSubtype="0" fill="hold" nodeType="clickEffect">
+                                  <p:stCondLst>
+                                    <p:cond delay="0"/>
+                                  </p:stCondLst>
+                                  <p:childTnLst>
+                                    <p:set>
+                                      <p:cBhvr>
+                                        <p:cTn id="6" dur="1" fill="hold">
+                                          <p:stCondLst>
+                                            <p:cond delay="0"/>
+                                          </p:stCondLst>
+                                        </p:cTn>
+                                        <p:tgtEl>
+                                          <p:spTgt spid="2">
+                                            <p:txEl>
+                                              <p:pRg st="3" end="3"/>
+                                            </p:txEl>
+                                          </p:spTgt>
+                                        </p:tgtEl>
+                                        <p:attrNameLst>
+                                          <p:attrName>style.visibility</p:attrName>
+                                        </p:attrNameLst>
+                                      </p:cBhvr>
+                                      <p:to>
+                                        <p:strVal val="visible"/>
+                                      </p:to>
+                                    </p:set>
+                                  </p:childTnLst>
+                                </p:cTn>
+                              </p:par>
+                              <p:par>
+                                <p:cTn id="7" presetID="1" presetClass="entr" presetSubtype="0" fill="hold" nodeType="withEffect">
+                                  <p:stCondLst>
+                                    <p:cond delay="0"/>
+                                  </p:stCondLst>
+                                  <p:childTnLst>
+                                    <p:set>
+                                      <p:cBhvr>
+                                        <p:cTn id="8" dur="1" fill="hold">
+                                          <p:stCondLst>
+                                            <p:cond delay="0"/>
+                                          </p:stCondLst>
+                                        </p:cTn>
+                                        <p:tgtEl>
+                                          <p:spTgt spid="2">
+                                            <p:txEl>
+                                              <p:pRg st="4" end="4"/>
+                                            </p:txEl>
+                                          </p:spTgt>
+                                        </p:tgtEl>
+                                        <p:attrNameLst>
+                                          <p:attrName>style.visibility</p:attrName>
+                                        </p:attrNameLst>
+                                      </p:cBhvr>
+                                      <p:to>
+                                        <p:strVal val="visible"/>
+                                      </p:to>
+                                    </p:set>
+                                  </p:childTnLst>
+                                </p:cTn>
+                              </p:par>
+                              <p:par>
+                                <p:cTn id="9" presetID="1" presetClass="entr" presetSubtype="0" fill="hold" nodeType="withEffect">
+                                  <p:stCondLst>
+                                    <p:cond delay="0"/>
+                                  </p:stCondLst>
+                                  <p:childTnLst>
+                                    <p:set>
+                                      <p:cBhvr>
+                                        <p:cTn id="10" dur="1" fill="hold">
+                                          <p:stCondLst>
+                                            <p:cond delay="0"/>
+                                          </p:stCondLst>
+                                        </p:cTn>
+                                        <p:tgtEl>
+                                          <p:spTgt spid="2">
+                                            <p:txEl>
+                                              <p:pRg st="5" end="5"/>
+                                            </p:txEl>
+                                          </p:spTgt>
+                                        </p:tgtEl>
+                                        <p:attrNameLst>
+                                          <p:attrName>style.visibility</p:attrName>
+                                        </p:attrNameLst>
+                                      </p:cBhvr>
+                                      <p:to>
+                                        <p:strVal val="visible"/>
+                                      </p:to>
+                                    </p:set>
+                                  </p:childTnLst>
+                                </p:cTn>
+                              </p:par>
+                            </p:childTnLst>
+                          </p:cTn>
+                        </p:par>
+                      </p:childTnLst>
+                    </p:cTn>
+                  </p:par>
+                </p:childTnLst>
+              </p:cTn>
+              <p:prevCondLst>
+                <p:cond evt="onPrev" delay="0">
+                  <p:tgtEl>
+                    <p:sldTgt/>
+                  </p:tgtEl>
+                </p:cond>
+              </p:prevCondLst>
+              <p:nextCondLst>
+                <p:cond evt="onNext" delay="0">
+                  <p:tgtEl>
+                    <p:sldTgt/>
+                  </p:tgtEl>
+                </p:cond>
+              </p:nextCondLst>
+            </p:seq>
+          </p:childTnLst>
+        </p:cTn>
+      </p:par>
+    </p:tnLst>
+  </p:timing>
+</p:sld>
+</file>
+
+<file path=ppt/slides/slide101.xml><?xml version="1.0" encoding="utf-8"?>
+<p:sld xmlns:a="http://schemas.openxmlformats.org/drawingml/2006/main" xmlns:r="http://schemas.openxmlformats.org/officeDocument/2006/relationships" xmlns:p="http://schemas.openxmlformats.org/presentationml/2006/main">
+  <p:cSld>
+    <p:spTree>
+      <p:nvGrpSpPr>
         <p:cNvPr id="1" name=""/>
         <p:cNvGrpSpPr/>
         <p:nvPr/>
@@ -3759,7 +4226,7 @@
 </p:sld>
 </file>
 
-<file path=ppt/slides/slide101.xml><?xml version="1.0" encoding="utf-8"?>
+<file path=ppt/slides/slide102.xml><?xml version="1.0" encoding="utf-8"?>
 <p:sld xmlns:a="http://schemas.openxmlformats.org/drawingml/2006/main" xmlns:r="http://schemas.openxmlformats.org/officeDocument/2006/relationships" xmlns:p="http://schemas.openxmlformats.org/presentationml/2006/main">
   <p:cSld>
     <p:spTree>
@@ -4116,7 +4583,7 @@
 </p:sld>
 </file>
 
-<file path=ppt/slides/slide102.xml><?xml version="1.0" encoding="utf-8"?>
+<file path=ppt/slides/slide103.xml><?xml version="1.0" encoding="utf-8"?>
 <p:sld xmlns:a="http://schemas.openxmlformats.org/drawingml/2006/main" xmlns:r="http://schemas.openxmlformats.org/officeDocument/2006/relationships" xmlns:p="http://schemas.openxmlformats.org/presentationml/2006/main">
   <p:cSld>
     <p:spTree>
@@ -4437,7 +4904,7 @@
 </p:sld>
 </file>
 
-<file path=ppt/slides/slide103.xml><?xml version="1.0" encoding="utf-8"?>
+<file path=ppt/slides/slide104.xml><?xml version="1.0" encoding="utf-8"?>
 <p:sld xmlns:a="http://schemas.openxmlformats.org/drawingml/2006/main" xmlns:r="http://schemas.openxmlformats.org/officeDocument/2006/relationships" xmlns:p="http://schemas.openxmlformats.org/presentationml/2006/main">
   <p:cSld>
     <p:spTree>
@@ -4758,7 +5225,7 @@
 </p:sld>
 </file>
 
-<file path=ppt/slides/slide104.xml><?xml version="1.0" encoding="utf-8"?>
+<file path=ppt/slides/slide105.xml><?xml version="1.0" encoding="utf-8"?>
 <p:sld xmlns:a="http://schemas.openxmlformats.org/drawingml/2006/main" xmlns:r="http://schemas.openxmlformats.org/officeDocument/2006/relationships" xmlns:p="http://schemas.openxmlformats.org/presentationml/2006/main">
   <p:cSld>
     <p:spTree>
@@ -5094,7 +5561,7 @@
 </p:sld>
 </file>
 
-<file path=ppt/slides/slide105.xml><?xml version="1.0" encoding="utf-8"?>
+<file path=ppt/slides/slide106.xml><?xml version="1.0" encoding="utf-8"?>
 <p:sld xmlns:a="http://schemas.openxmlformats.org/drawingml/2006/main" xmlns:r="http://schemas.openxmlformats.org/officeDocument/2006/relationships" xmlns:p="http://schemas.openxmlformats.org/presentationml/2006/main">
   <p:cSld>
     <p:spTree>
@@ -5436,7 +5903,7 @@
 </p:sld>
 </file>
 
-<file path=ppt/slides/slide106.xml><?xml version="1.0" encoding="utf-8"?>
+<file path=ppt/slides/slide107.xml><?xml version="1.0" encoding="utf-8"?>
 <p:sld xmlns:a="http://schemas.openxmlformats.org/drawingml/2006/main" xmlns:r="http://schemas.openxmlformats.org/officeDocument/2006/relationships" xmlns:p="http://schemas.openxmlformats.org/presentationml/2006/main">
   <p:cSld>
     <p:spTree>
@@ -5887,7 +6354,7 @@
 </p:sld>
 </file>
 
-<file path=ppt/slides/slide107.xml><?xml version="1.0" encoding="utf-8"?>
+<file path=ppt/slides/slide108.xml><?xml version="1.0" encoding="utf-8"?>
 <p:sld xmlns:a="http://schemas.openxmlformats.org/drawingml/2006/main" xmlns:r="http://schemas.openxmlformats.org/officeDocument/2006/relationships" xmlns:p="http://schemas.openxmlformats.org/presentationml/2006/main">
   <p:cSld>
     <p:spTree>
@@ -6160,261 +6627,6 @@
     <p:extLst>
       <p:ext uri="{BB962C8B-B14F-4D97-AF65-F5344CB8AC3E}">
         <p14:creationId xmlns:p14="http://schemas.microsoft.com/office/powerpoint/2010/main" val="1337223264"/>
-      </p:ext>
-    </p:extLst>
-  </p:cSld>
-  <p:clrMapOvr>
-    <a:masterClrMapping/>
-  </p:clrMapOvr>
-</p:sld>
-</file>
-
-<file path=ppt/slides/slide108.xml><?xml version="1.0" encoding="utf-8"?>
-<p:sld xmlns:a="http://schemas.openxmlformats.org/drawingml/2006/main" xmlns:r="http://schemas.openxmlformats.org/officeDocument/2006/relationships" xmlns:p="http://schemas.openxmlformats.org/presentationml/2006/main">
-  <p:cSld>
-    <p:spTree>
-      <p:nvGrpSpPr>
-        <p:cNvPr id="1" name=""/>
-        <p:cNvGrpSpPr/>
-        <p:nvPr/>
-      </p:nvGrpSpPr>
-      <p:grpSpPr>
-        <a:xfrm>
-          <a:off x="0" y="0"/>
-          <a:ext cx="0" cy="0"/>
-          <a:chOff x="0" y="0"/>
-          <a:chExt cx="0" cy="0"/>
-        </a:xfrm>
-      </p:grpSpPr>
-      <p:sp>
-        <p:nvSpPr>
-          <p:cNvPr id="2" name="Content Placeholder 1">
-            <a:extLst>
-              <a:ext uri="{FF2B5EF4-FFF2-40B4-BE49-F238E27FC236}">
-                <a16:creationId xmlns:a16="http://schemas.microsoft.com/office/drawing/2014/main" id="{D5C65873-B95A-9DFC-4393-9A087BE9ACB8}"/>
-              </a:ext>
-            </a:extLst>
-          </p:cNvPr>
-          <p:cNvSpPr>
-            <a:spLocks noGrp="1"/>
-          </p:cNvSpPr>
-          <p:nvPr>
-            <p:ph idx="1"/>
-          </p:nvPr>
-        </p:nvSpPr>
-        <p:spPr/>
-        <p:txBody>
-          <a:bodyPr>
-            <a:normAutofit lnSpcReduction="10000"/>
-          </a:bodyPr>
-          <a:lstStyle/>
-          <a:p>
-            <a:pPr marL="0" indent="0">
-              <a:buNone/>
-            </a:pPr>
-            <a:r>
-              <a:rPr lang="en-GB" dirty="0"/>
-              <a:t>To sort, index by the grade.</a:t>
-            </a:r>
-          </a:p>
-          <a:p>
-            <a:pPr marL="0" indent="0">
-              <a:buNone/>
-            </a:pPr>
-            <a:r>
-              <a:rPr lang="en-GB" dirty="0"/>
-              <a:t>This allows sorting one array by ordering of another.</a:t>
-            </a:r>
-          </a:p>
-          <a:p>
-            <a:pPr marL="0" indent="0">
-              <a:spcAft>
-                <a:spcPts val="0"/>
-              </a:spcAft>
-              <a:buNone/>
-            </a:pPr>
-            <a:r>
-              <a:rPr lang="en-GB" dirty="0">
-                <a:latin typeface="APL385 Unicode" panose="020B0709000202000203" pitchFamily="49" charset="0"/>
-              </a:rPr>
-              <a:t>      </a:t>
-            </a:r>
-            <a:r>
-              <a:rPr lang="en-GB" dirty="0">
-                <a:solidFill>
-                  <a:srgbClr val="00B050"/>
-                </a:solidFill>
-                <a:latin typeface="APL385 Unicode" panose="020B0709000202000203" pitchFamily="49" charset="0"/>
-              </a:rPr>
-              <a:t>names  ← 3 7⍴'Anna   Ben    Charlie'</a:t>
-            </a:r>
-          </a:p>
-          <a:p>
-            <a:pPr marL="0" indent="0">
-              <a:spcAft>
-                <a:spcPts val="0"/>
-              </a:spcAft>
-              <a:buNone/>
-            </a:pPr>
-            <a:r>
-              <a:rPr lang="en-GB" dirty="0">
-                <a:solidFill>
-                  <a:srgbClr val="00B050"/>
-                </a:solidFill>
-                <a:latin typeface="APL385 Unicode" panose="020B0709000202000203" pitchFamily="49" charset="0"/>
-              </a:rPr>
-              <a:t>      scores ← 5 2 8</a:t>
-            </a:r>
-          </a:p>
-          <a:p>
-            <a:pPr marL="0" indent="0">
-              <a:spcAft>
-                <a:spcPts val="0"/>
-              </a:spcAft>
-              <a:buNone/>
-            </a:pPr>
-            <a:r>
-              <a:rPr lang="en-GB" dirty="0">
-                <a:solidFill>
-                  <a:srgbClr val="00B050"/>
-                </a:solidFill>
-                <a:latin typeface="APL385 Unicode" panose="020B0709000202000203" pitchFamily="49" charset="0"/>
-              </a:rPr>
-              <a:t>      names[</a:t>
-            </a:r>
-            <a:r>
-              <a:rPr lang="en-GB" dirty="0">
-                <a:solidFill>
-                  <a:srgbClr val="FF6600"/>
-                </a:solidFill>
-                <a:latin typeface="APL385 Unicode" panose="020B0709000202000203" pitchFamily="49" charset="0"/>
-              </a:rPr>
-              <a:t>⍒</a:t>
-            </a:r>
-            <a:r>
-              <a:rPr lang="en-GB" dirty="0">
-                <a:solidFill>
-                  <a:srgbClr val="00B050"/>
-                </a:solidFill>
-                <a:latin typeface="APL385 Unicode" panose="020B0709000202000203" pitchFamily="49" charset="0"/>
-              </a:rPr>
-              <a:t>scores;]</a:t>
-            </a:r>
-          </a:p>
-          <a:p>
-            <a:pPr marL="0" indent="0">
-              <a:spcAft>
-                <a:spcPts val="0"/>
-              </a:spcAft>
-              <a:buNone/>
-            </a:pPr>
-            <a:r>
-              <a:rPr lang="en-GB" dirty="0">
-                <a:latin typeface="APL385 Unicode" panose="020B0709000202000203" pitchFamily="49" charset="0"/>
-              </a:rPr>
-              <a:t>Charlie</a:t>
-            </a:r>
-          </a:p>
-          <a:p>
-            <a:pPr marL="0" indent="0">
-              <a:spcAft>
-                <a:spcPts val="0"/>
-              </a:spcAft>
-              <a:buNone/>
-            </a:pPr>
-            <a:r>
-              <a:rPr lang="en-GB" dirty="0">
-                <a:latin typeface="APL385 Unicode" panose="020B0709000202000203" pitchFamily="49" charset="0"/>
-              </a:rPr>
-              <a:t>Anna   </a:t>
-            </a:r>
-          </a:p>
-          <a:p>
-            <a:pPr marL="0" indent="0">
-              <a:spcAft>
-                <a:spcPts val="0"/>
-              </a:spcAft>
-              <a:buNone/>
-            </a:pPr>
-            <a:r>
-              <a:rPr lang="en-GB" dirty="0">
-                <a:latin typeface="APL385 Unicode" panose="020B0709000202000203" pitchFamily="49" charset="0"/>
-              </a:rPr>
-              <a:t>Ben </a:t>
-            </a:r>
-          </a:p>
-        </p:txBody>
-      </p:sp>
-      <p:sp>
-        <p:nvSpPr>
-          <p:cNvPr id="3" name="Title 2">
-            <a:extLst>
-              <a:ext uri="{FF2B5EF4-FFF2-40B4-BE49-F238E27FC236}">
-                <a16:creationId xmlns:a16="http://schemas.microsoft.com/office/drawing/2014/main" id="{3B979C53-D5D2-1CB0-69C5-264978C9A2CD}"/>
-              </a:ext>
-            </a:extLst>
-          </p:cNvPr>
-          <p:cNvSpPr>
-            <a:spLocks noGrp="1"/>
-          </p:cNvSpPr>
-          <p:nvPr>
-            <p:ph type="title"/>
-          </p:nvPr>
-        </p:nvSpPr>
-        <p:spPr/>
-        <p:txBody>
-          <a:bodyPr/>
-          <a:lstStyle/>
-          <a:p>
-            <a:r>
-              <a:rPr lang="en-GB" dirty="0"/>
-              <a:t>Grade (</a:t>
-            </a:r>
-            <a:r>
-              <a:rPr lang="en-GB" dirty="0">
-                <a:solidFill>
-                  <a:srgbClr val="FF6600"/>
-                </a:solidFill>
-                <a:latin typeface="APL385 Unicode" panose="020B0709000202000203" pitchFamily="49" charset="0"/>
-              </a:rPr>
-              <a:t>⍋⍵</a:t>
-            </a:r>
-            <a:r>
-              <a:rPr lang="en-GB" dirty="0"/>
-              <a:t>)</a:t>
-            </a:r>
-          </a:p>
-        </p:txBody>
-      </p:sp>
-      <p:sp>
-        <p:nvSpPr>
-          <p:cNvPr id="4" name="Media Placeholder 3">
-            <a:extLst>
-              <a:ext uri="{FF2B5EF4-FFF2-40B4-BE49-F238E27FC236}">
-                <a16:creationId xmlns:a16="http://schemas.microsoft.com/office/drawing/2014/main" id="{DC611322-A54C-17CC-9BDC-7BC668B63FA9}"/>
-              </a:ext>
-            </a:extLst>
-          </p:cNvPr>
-          <p:cNvSpPr>
-            <a:spLocks noGrp="1"/>
-          </p:cNvSpPr>
-          <p:nvPr>
-            <p:ph type="media" sz="quarter" idx="11"/>
-          </p:nvPr>
-        </p:nvSpPr>
-        <p:spPr/>
-        <p:txBody>
-          <a:bodyPr/>
-          <a:lstStyle/>
-          <a:p>
-            <a:endParaRPr lang="en-GB"/>
-          </a:p>
-        </p:txBody>
-      </p:sp>
-    </p:spTree>
-    <p:extLst>
-      <p:ext uri="{BB962C8B-B14F-4D97-AF65-F5344CB8AC3E}">
-        <p14:creationId xmlns:p14="http://schemas.microsoft.com/office/powerpoint/2010/main" val="3931585336"/>
       </p:ext>
     </p:extLst>
   </p:cSld>
@@ -6446,7 +6658,7 @@
           <p:cNvPr id="2" name="Content Placeholder 1">
             <a:extLst>
               <a:ext uri="{FF2B5EF4-FFF2-40B4-BE49-F238E27FC236}">
-                <a16:creationId xmlns:a16="http://schemas.microsoft.com/office/drawing/2014/main" id="{DDF89011-3F84-8393-01A2-6506AFCE9F1C}"/>
+                <a16:creationId xmlns:a16="http://schemas.microsoft.com/office/drawing/2014/main" id="{D5C65873-B95A-9DFC-4393-9A087BE9ACB8}"/>
               </a:ext>
             </a:extLst>
           </p:cNvPr>
@@ -6459,7 +6671,9 @@
         </p:nvSpPr>
         <p:spPr/>
         <p:txBody>
-          <a:bodyPr/>
+          <a:bodyPr>
+            <a:normAutofit lnSpcReduction="10000"/>
+          </a:bodyPr>
           <a:lstStyle/>
           <a:p>
             <a:pPr marL="0" indent="0">
@@ -6467,7 +6681,7 @@
             </a:pPr>
             <a:r>
               <a:rPr lang="en-GB" dirty="0"/>
-              <a:t>Expressions involving selection may appear to the left of an assignment.</a:t>
+              <a:t>To sort, index by the grade.</a:t>
             </a:r>
           </a:p>
           <a:p>
@@ -6476,11 +6690,14 @@
             </a:pPr>
             <a:r>
               <a:rPr lang="en-GB" dirty="0"/>
-              <a:t>For example, instead of</a:t>
-            </a:r>
-          </a:p>
-          <a:p>
-            <a:pPr marL="0" indent="0">
+              <a:t>This allows sorting one array by ordering of another.</a:t>
+            </a:r>
+          </a:p>
+          <a:p>
+            <a:pPr marL="0" indent="0">
+              <a:spcAft>
+                <a:spcPts val="0"/>
+              </a:spcAft>
               <a:buNone/>
             </a:pPr>
             <a:r>
@@ -6492,106 +6709,105 @@
             <a:r>
               <a:rPr lang="en-GB" dirty="0">
                 <a:solidFill>
-                  <a:srgbClr val="FF0000"/>
-                </a:solidFill>
-                <a:latin typeface="APL385 Unicode" panose="020B0709000202000203" pitchFamily="49" charset="0"/>
-              </a:rPr>
-              <a:t>V[</a:t>
-            </a:r>
-            <a:r>
-              <a:rPr lang="en-GB" dirty="0">
-                <a:solidFill>
-                  <a:srgbClr val="FFC000"/>
-                </a:solidFill>
-                <a:latin typeface="APL385 Unicode" panose="020B0709000202000203" pitchFamily="49" charset="0"/>
-              </a:rPr>
-              <a:t>b</a:t>
-            </a:r>
-            <a:r>
-              <a:rPr lang="en-GB" dirty="0">
-                <a:solidFill>
-                  <a:srgbClr val="FF0000"/>
-                </a:solidFill>
-                <a:latin typeface="APL385 Unicode" panose="020B0709000202000203" pitchFamily="49" charset="0"/>
-              </a:rPr>
-              <a:t>/⍳⍴</a:t>
-            </a:r>
-            <a:r>
-              <a:rPr lang="en-GB" dirty="0">
-                <a:solidFill>
-                  <a:srgbClr val="FFC000"/>
-                </a:solidFill>
-                <a:latin typeface="APL385 Unicode" panose="020B0709000202000203" pitchFamily="49" charset="0"/>
-              </a:rPr>
-              <a:t>b</a:t>
-            </a:r>
-            <a:r>
-              <a:rPr lang="en-GB" dirty="0">
-                <a:solidFill>
-                  <a:srgbClr val="FF0000"/>
-                </a:solidFill>
-                <a:latin typeface="APL385 Unicode" panose="020B0709000202000203" pitchFamily="49" charset="0"/>
-              </a:rPr>
-              <a:t>] ←</a:t>
-            </a:r>
-            <a:r>
-              <a:rPr lang="en-GB" dirty="0">
-                <a:latin typeface="APL385 Unicode" panose="020B0709000202000203" pitchFamily="49" charset="0"/>
-              </a:rPr>
-              <a:t> ⍳+/b</a:t>
-            </a:r>
-          </a:p>
-          <a:p>
-            <a:pPr marL="0" indent="0">
-              <a:buNone/>
-            </a:pPr>
-            <a:r>
-              <a:rPr lang="en-GB" dirty="0"/>
-              <a:t>write</a:t>
-            </a:r>
-          </a:p>
-          <a:p>
-            <a:pPr marL="0" indent="0">
-              <a:buNone/>
-            </a:pPr>
-            <a:r>
-              <a:rPr lang="en-GB" dirty="0">
-                <a:latin typeface="APL385 Unicode" panose="020B0709000202000203" pitchFamily="49" charset="0"/>
-              </a:rPr>
-              <a:t>      </a:t>
-            </a:r>
-            <a:r>
-              <a:rPr lang="en-GB" dirty="0">
-                <a:solidFill>
-                  <a:srgbClr val="FF0000"/>
-                </a:solidFill>
-                <a:latin typeface="APL385 Unicode" panose="020B0709000202000203" pitchFamily="49" charset="0"/>
-              </a:rPr>
-              <a:t>(</a:t>
-            </a:r>
-            <a:r>
-              <a:rPr lang="en-GB" dirty="0">
-                <a:solidFill>
-                  <a:srgbClr val="FFC000"/>
-                </a:solidFill>
-                <a:latin typeface="APL385 Unicode" panose="020B0709000202000203" pitchFamily="49" charset="0"/>
-              </a:rPr>
-              <a:t>b</a:t>
-            </a:r>
-            <a:r>
-              <a:rPr lang="en-GB" dirty="0">
-                <a:solidFill>
-                  <a:srgbClr val="FF0000"/>
-                </a:solidFill>
-                <a:latin typeface="APL385 Unicode" panose="020B0709000202000203" pitchFamily="49" charset="0"/>
-              </a:rPr>
-              <a:t>/V) ← </a:t>
-            </a:r>
-            <a:r>
-              <a:rPr lang="en-GB" dirty="0">
-                <a:latin typeface="APL385 Unicode" panose="020B0709000202000203" pitchFamily="49" charset="0"/>
-              </a:rPr>
-              <a:t>⍳+/b</a:t>
+                  <a:srgbClr val="00B050"/>
+                </a:solidFill>
+                <a:latin typeface="APL385 Unicode" panose="020B0709000202000203" pitchFamily="49" charset="0"/>
+              </a:rPr>
+              <a:t>names  ← 3 7⍴'Anna   Ben    Charlie'</a:t>
+            </a:r>
+          </a:p>
+          <a:p>
+            <a:pPr marL="0" indent="0">
+              <a:spcAft>
+                <a:spcPts val="0"/>
+              </a:spcAft>
+              <a:buNone/>
+            </a:pPr>
+            <a:r>
+              <a:rPr lang="en-GB" dirty="0">
+                <a:solidFill>
+                  <a:srgbClr val="00B050"/>
+                </a:solidFill>
+                <a:latin typeface="APL385 Unicode" panose="020B0709000202000203" pitchFamily="49" charset="0"/>
+              </a:rPr>
+              <a:t>      scores ← 5 2 8</a:t>
+            </a:r>
+          </a:p>
+          <a:p>
+            <a:pPr marL="0" indent="0">
+              <a:spcAft>
+                <a:spcPts val="0"/>
+              </a:spcAft>
+              <a:buNone/>
+            </a:pPr>
+            <a:r>
+              <a:rPr lang="en-GB" dirty="0">
+                <a:solidFill>
+                  <a:srgbClr val="00B050"/>
+                </a:solidFill>
+                <a:latin typeface="APL385 Unicode" panose="020B0709000202000203" pitchFamily="49" charset="0"/>
+              </a:rPr>
+              <a:t>      names[</a:t>
+            </a:r>
+            <a:r>
+              <a:rPr lang="en-GB" dirty="0">
+                <a:solidFill>
+                  <a:srgbClr val="FF6600"/>
+                </a:solidFill>
+                <a:latin typeface="APL385 Unicode" panose="020B0709000202000203" pitchFamily="49" charset="0"/>
+              </a:rPr>
+              <a:t>⍒</a:t>
+            </a:r>
+            <a:r>
+              <a:rPr lang="en-GB" dirty="0">
+                <a:solidFill>
+                  <a:srgbClr val="00B050"/>
+                </a:solidFill>
+                <a:latin typeface="APL385 Unicode" panose="020B0709000202000203" pitchFamily="49" charset="0"/>
+              </a:rPr>
+              <a:t>scores;]</a:t>
+            </a:r>
+          </a:p>
+          <a:p>
+            <a:pPr marL="0" indent="0">
+              <a:spcAft>
+                <a:spcPts val="0"/>
+              </a:spcAft>
+              <a:buNone/>
+            </a:pPr>
+            <a:r>
+              <a:rPr lang="en-GB" dirty="0">
+                <a:latin typeface="APL385 Unicode" panose="020B0709000202000203" pitchFamily="49" charset="0"/>
+              </a:rPr>
+              <a:t>Charlie</a:t>
+            </a:r>
+          </a:p>
+          <a:p>
+            <a:pPr marL="0" indent="0">
+              <a:spcAft>
+                <a:spcPts val="0"/>
+              </a:spcAft>
+              <a:buNone/>
+            </a:pPr>
+            <a:r>
+              <a:rPr lang="en-GB" dirty="0">
+                <a:latin typeface="APL385 Unicode" panose="020B0709000202000203" pitchFamily="49" charset="0"/>
+              </a:rPr>
+              <a:t>Anna   </a:t>
+            </a:r>
+          </a:p>
+          <a:p>
+            <a:pPr marL="0" indent="0">
+              <a:spcAft>
+                <a:spcPts val="0"/>
+              </a:spcAft>
+              <a:buNone/>
+            </a:pPr>
+            <a:r>
+              <a:rPr lang="en-GB" dirty="0">
+                <a:latin typeface="APL385 Unicode" panose="020B0709000202000203" pitchFamily="49" charset="0"/>
+              </a:rPr>
+              <a:t>Ben </a:t>
             </a:r>
           </a:p>
         </p:txBody>
@@ -6601,7 +6817,7 @@
           <p:cNvPr id="3" name="Title 2">
             <a:extLst>
               <a:ext uri="{FF2B5EF4-FFF2-40B4-BE49-F238E27FC236}">
-                <a16:creationId xmlns:a16="http://schemas.microsoft.com/office/drawing/2014/main" id="{231B4644-607D-6D53-5D24-B63164BFCC7D}"/>
+                <a16:creationId xmlns:a16="http://schemas.microsoft.com/office/drawing/2014/main" id="{3B979C53-D5D2-1CB0-69C5-264978C9A2CD}"/>
               </a:ext>
             </a:extLst>
           </p:cNvPr>
@@ -6619,7 +6835,20 @@
           <a:p>
             <a:r>
               <a:rPr lang="en-GB" dirty="0"/>
-              <a:t>Selective Assignment</a:t>
+              <a:t>Grade (</a:t>
+            </a:r>
+            <a:r>
+              <a:rPr lang="en-GB" dirty="0">
+                <a:solidFill>
+                  <a:srgbClr val="FF6600"/>
+                </a:solidFill>
+                <a:latin typeface="APL385 Unicode" panose="020B0709000202000203" pitchFamily="49" charset="0"/>
+              </a:rPr>
+              <a:t>⍋⍵</a:t>
+            </a:r>
+            <a:r>
+              <a:rPr lang="en-GB" dirty="0"/>
+              <a:t>)</a:t>
             </a:r>
           </a:p>
         </p:txBody>
@@ -6629,7 +6858,7 @@
           <p:cNvPr id="4" name="Media Placeholder 3">
             <a:extLst>
               <a:ext uri="{FF2B5EF4-FFF2-40B4-BE49-F238E27FC236}">
-                <a16:creationId xmlns:a16="http://schemas.microsoft.com/office/drawing/2014/main" id="{86B22576-B14D-9B8B-5E55-ED81B817797E}"/>
+                <a16:creationId xmlns:a16="http://schemas.microsoft.com/office/drawing/2014/main" id="{DC611322-A54C-17CC-9BDC-7BC668B63FA9}"/>
               </a:ext>
             </a:extLst>
           </p:cNvPr>
@@ -6652,7 +6881,7 @@
     </p:spTree>
     <p:extLst>
       <p:ext uri="{BB962C8B-B14F-4D97-AF65-F5344CB8AC3E}">
-        <p14:creationId xmlns:p14="http://schemas.microsoft.com/office/powerpoint/2010/main" val="1441170928"/>
+        <p14:creationId xmlns:p14="http://schemas.microsoft.com/office/powerpoint/2010/main" val="3931585336"/>
       </p:ext>
     </p:extLst>
   </p:cSld>
@@ -6883,6 +7112,244 @@
 </file>
 
 <file path=ppt/slides/slide110.xml><?xml version="1.0" encoding="utf-8"?>
+<p:sld xmlns:a="http://schemas.openxmlformats.org/drawingml/2006/main" xmlns:r="http://schemas.openxmlformats.org/officeDocument/2006/relationships" xmlns:p="http://schemas.openxmlformats.org/presentationml/2006/main">
+  <p:cSld>
+    <p:spTree>
+      <p:nvGrpSpPr>
+        <p:cNvPr id="1" name=""/>
+        <p:cNvGrpSpPr/>
+        <p:nvPr/>
+      </p:nvGrpSpPr>
+      <p:grpSpPr>
+        <a:xfrm>
+          <a:off x="0" y="0"/>
+          <a:ext cx="0" cy="0"/>
+          <a:chOff x="0" y="0"/>
+          <a:chExt cx="0" cy="0"/>
+        </a:xfrm>
+      </p:grpSpPr>
+      <p:sp>
+        <p:nvSpPr>
+          <p:cNvPr id="2" name="Content Placeholder 1">
+            <a:extLst>
+              <a:ext uri="{FF2B5EF4-FFF2-40B4-BE49-F238E27FC236}">
+                <a16:creationId xmlns:a16="http://schemas.microsoft.com/office/drawing/2014/main" id="{DDF89011-3F84-8393-01A2-6506AFCE9F1C}"/>
+              </a:ext>
+            </a:extLst>
+          </p:cNvPr>
+          <p:cNvSpPr>
+            <a:spLocks noGrp="1"/>
+          </p:cNvSpPr>
+          <p:nvPr>
+            <p:ph idx="1"/>
+          </p:nvPr>
+        </p:nvSpPr>
+        <p:spPr/>
+        <p:txBody>
+          <a:bodyPr/>
+          <a:lstStyle/>
+          <a:p>
+            <a:pPr marL="0" indent="0">
+              <a:buNone/>
+            </a:pPr>
+            <a:r>
+              <a:rPr lang="en-GB" dirty="0"/>
+              <a:t>Expressions involving selection may appear to the left of an assignment.</a:t>
+            </a:r>
+          </a:p>
+          <a:p>
+            <a:pPr marL="0" indent="0">
+              <a:buNone/>
+            </a:pPr>
+            <a:r>
+              <a:rPr lang="en-GB" dirty="0"/>
+              <a:t>For example, instead of</a:t>
+            </a:r>
+          </a:p>
+          <a:p>
+            <a:pPr marL="0" indent="0">
+              <a:buNone/>
+            </a:pPr>
+            <a:r>
+              <a:rPr lang="en-GB" dirty="0">
+                <a:latin typeface="APL385 Unicode" panose="020B0709000202000203" pitchFamily="49" charset="0"/>
+              </a:rPr>
+              <a:t>      </a:t>
+            </a:r>
+            <a:r>
+              <a:rPr lang="en-GB" dirty="0">
+                <a:solidFill>
+                  <a:srgbClr val="FF0000"/>
+                </a:solidFill>
+                <a:latin typeface="APL385 Unicode" panose="020B0709000202000203" pitchFamily="49" charset="0"/>
+              </a:rPr>
+              <a:t>V[</a:t>
+            </a:r>
+            <a:r>
+              <a:rPr lang="en-GB" dirty="0">
+                <a:solidFill>
+                  <a:srgbClr val="FFC000"/>
+                </a:solidFill>
+                <a:latin typeface="APL385 Unicode" panose="020B0709000202000203" pitchFamily="49" charset="0"/>
+              </a:rPr>
+              <a:t>b</a:t>
+            </a:r>
+            <a:r>
+              <a:rPr lang="en-GB" dirty="0">
+                <a:solidFill>
+                  <a:srgbClr val="FF0000"/>
+                </a:solidFill>
+                <a:latin typeface="APL385 Unicode" panose="020B0709000202000203" pitchFamily="49" charset="0"/>
+              </a:rPr>
+              <a:t>/⍳⍴</a:t>
+            </a:r>
+            <a:r>
+              <a:rPr lang="en-GB" dirty="0">
+                <a:solidFill>
+                  <a:srgbClr val="FFC000"/>
+                </a:solidFill>
+                <a:latin typeface="APL385 Unicode" panose="020B0709000202000203" pitchFamily="49" charset="0"/>
+              </a:rPr>
+              <a:t>b</a:t>
+            </a:r>
+            <a:r>
+              <a:rPr lang="en-GB" dirty="0">
+                <a:solidFill>
+                  <a:srgbClr val="FF0000"/>
+                </a:solidFill>
+                <a:latin typeface="APL385 Unicode" panose="020B0709000202000203" pitchFamily="49" charset="0"/>
+              </a:rPr>
+              <a:t>] ←</a:t>
+            </a:r>
+            <a:r>
+              <a:rPr lang="en-GB" dirty="0">
+                <a:latin typeface="APL385 Unicode" panose="020B0709000202000203" pitchFamily="49" charset="0"/>
+              </a:rPr>
+              <a:t> ⍳+/b</a:t>
+            </a:r>
+          </a:p>
+          <a:p>
+            <a:pPr marL="0" indent="0">
+              <a:buNone/>
+            </a:pPr>
+            <a:r>
+              <a:rPr lang="en-GB" dirty="0"/>
+              <a:t>write</a:t>
+            </a:r>
+          </a:p>
+          <a:p>
+            <a:pPr marL="0" indent="0">
+              <a:buNone/>
+            </a:pPr>
+            <a:r>
+              <a:rPr lang="en-GB" dirty="0">
+                <a:latin typeface="APL385 Unicode" panose="020B0709000202000203" pitchFamily="49" charset="0"/>
+              </a:rPr>
+              <a:t>      </a:t>
+            </a:r>
+            <a:r>
+              <a:rPr lang="en-GB" dirty="0">
+                <a:solidFill>
+                  <a:srgbClr val="FF0000"/>
+                </a:solidFill>
+                <a:latin typeface="APL385 Unicode" panose="020B0709000202000203" pitchFamily="49" charset="0"/>
+              </a:rPr>
+              <a:t>(</a:t>
+            </a:r>
+            <a:r>
+              <a:rPr lang="en-GB" dirty="0">
+                <a:solidFill>
+                  <a:srgbClr val="FFC000"/>
+                </a:solidFill>
+                <a:latin typeface="APL385 Unicode" panose="020B0709000202000203" pitchFamily="49" charset="0"/>
+              </a:rPr>
+              <a:t>b</a:t>
+            </a:r>
+            <a:r>
+              <a:rPr lang="en-GB" dirty="0">
+                <a:solidFill>
+                  <a:srgbClr val="FF0000"/>
+                </a:solidFill>
+                <a:latin typeface="APL385 Unicode" panose="020B0709000202000203" pitchFamily="49" charset="0"/>
+              </a:rPr>
+              <a:t>/V) ← </a:t>
+            </a:r>
+            <a:r>
+              <a:rPr lang="en-GB" dirty="0">
+                <a:latin typeface="APL385 Unicode" panose="020B0709000202000203" pitchFamily="49" charset="0"/>
+              </a:rPr>
+              <a:t>⍳+/b</a:t>
+            </a:r>
+          </a:p>
+        </p:txBody>
+      </p:sp>
+      <p:sp>
+        <p:nvSpPr>
+          <p:cNvPr id="3" name="Title 2">
+            <a:extLst>
+              <a:ext uri="{FF2B5EF4-FFF2-40B4-BE49-F238E27FC236}">
+                <a16:creationId xmlns:a16="http://schemas.microsoft.com/office/drawing/2014/main" id="{231B4644-607D-6D53-5D24-B63164BFCC7D}"/>
+              </a:ext>
+            </a:extLst>
+          </p:cNvPr>
+          <p:cNvSpPr>
+            <a:spLocks noGrp="1"/>
+          </p:cNvSpPr>
+          <p:nvPr>
+            <p:ph type="title"/>
+          </p:nvPr>
+        </p:nvSpPr>
+        <p:spPr/>
+        <p:txBody>
+          <a:bodyPr/>
+          <a:lstStyle/>
+          <a:p>
+            <a:r>
+              <a:rPr lang="en-GB" dirty="0"/>
+              <a:t>Selective Assignment</a:t>
+            </a:r>
+          </a:p>
+        </p:txBody>
+      </p:sp>
+      <p:sp>
+        <p:nvSpPr>
+          <p:cNvPr id="4" name="Media Placeholder 3">
+            <a:extLst>
+              <a:ext uri="{FF2B5EF4-FFF2-40B4-BE49-F238E27FC236}">
+                <a16:creationId xmlns:a16="http://schemas.microsoft.com/office/drawing/2014/main" id="{86B22576-B14D-9B8B-5E55-ED81B817797E}"/>
+              </a:ext>
+            </a:extLst>
+          </p:cNvPr>
+          <p:cNvSpPr>
+            <a:spLocks noGrp="1"/>
+          </p:cNvSpPr>
+          <p:nvPr>
+            <p:ph type="media" sz="quarter" idx="11"/>
+          </p:nvPr>
+        </p:nvSpPr>
+        <p:spPr/>
+        <p:txBody>
+          <a:bodyPr/>
+          <a:lstStyle/>
+          <a:p>
+            <a:endParaRPr lang="en-GB"/>
+          </a:p>
+        </p:txBody>
+      </p:sp>
+    </p:spTree>
+    <p:extLst>
+      <p:ext uri="{BB962C8B-B14F-4D97-AF65-F5344CB8AC3E}">
+        <p14:creationId xmlns:p14="http://schemas.microsoft.com/office/powerpoint/2010/main" val="1441170928"/>
+      </p:ext>
+    </p:extLst>
+  </p:cSld>
+  <p:clrMapOvr>
+    <a:masterClrMapping/>
+  </p:clrMapOvr>
+</p:sld>
+</file>
+
+<file path=ppt/slides/slide111.xml><?xml version="1.0" encoding="utf-8"?>
 <p:sld xmlns:a="http://schemas.openxmlformats.org/drawingml/2006/main" xmlns:r="http://schemas.openxmlformats.org/officeDocument/2006/relationships" xmlns:p="http://schemas.openxmlformats.org/presentationml/2006/main">
   <p:cSld>
     <p:spTree>
@@ -7294,270 +7761,6 @@
 </p:sld>
 </file>
 
-<file path=ppt/slides/slide111.xml><?xml version="1.0" encoding="utf-8"?>
-<p:sld xmlns:a="http://schemas.openxmlformats.org/drawingml/2006/main" xmlns:r="http://schemas.openxmlformats.org/officeDocument/2006/relationships" xmlns:p="http://schemas.openxmlformats.org/presentationml/2006/main">
-  <p:cSld>
-    <p:spTree>
-      <p:nvGrpSpPr>
-        <p:cNvPr id="1" name=""/>
-        <p:cNvGrpSpPr/>
-        <p:nvPr/>
-      </p:nvGrpSpPr>
-      <p:grpSpPr>
-        <a:xfrm>
-          <a:off x="0" y="0"/>
-          <a:ext cx="0" cy="0"/>
-          <a:chOff x="0" y="0"/>
-          <a:chExt cx="0" cy="0"/>
-        </a:xfrm>
-      </p:grpSpPr>
-      <p:sp>
-        <p:nvSpPr>
-          <p:cNvPr id="2" name="Content Placeholder 1">
-            <a:extLst>
-              <a:ext uri="{FF2B5EF4-FFF2-40B4-BE49-F238E27FC236}">
-                <a16:creationId xmlns:a16="http://schemas.microsoft.com/office/drawing/2014/main" id="{0A40213B-B61B-FD7A-5358-5A1C2C6CB1F5}"/>
-              </a:ext>
-            </a:extLst>
-          </p:cNvPr>
-          <p:cNvSpPr>
-            <a:spLocks noGrp="1"/>
-          </p:cNvSpPr>
-          <p:nvPr>
-            <p:ph idx="1"/>
-          </p:nvPr>
-        </p:nvSpPr>
-        <p:spPr/>
-        <p:txBody>
-          <a:bodyPr>
-            <a:normAutofit fontScale="85000" lnSpcReduction="20000"/>
-          </a:bodyPr>
-          <a:lstStyle/>
-          <a:p>
-            <a:pPr marL="0" indent="0">
-              <a:buNone/>
-            </a:pPr>
-            <a:r>
-              <a:rPr lang="en-GB" dirty="0"/>
-              <a:t>Assign to multiple names at once</a:t>
-            </a:r>
-          </a:p>
-          <a:p>
-            <a:pPr marL="0" indent="0">
-              <a:spcAft>
-                <a:spcPts val="600"/>
-              </a:spcAft>
-              <a:buNone/>
-            </a:pPr>
-            <a:r>
-              <a:rPr lang="en-GB" dirty="0">
-                <a:latin typeface="APL385 Unicode" panose="020B0709000202000203" pitchFamily="49" charset="0"/>
-              </a:rPr>
-              <a:t>      </a:t>
-            </a:r>
-            <a:r>
-              <a:rPr lang="en-GB" dirty="0">
-                <a:solidFill>
-                  <a:srgbClr val="00B050"/>
-                </a:solidFill>
-                <a:latin typeface="APL385 Unicode" panose="020B0709000202000203" pitchFamily="49" charset="0"/>
-              </a:rPr>
-              <a:t>(a b c)←42 (2 3⍴⍳4) 'a string'</a:t>
-            </a:r>
-          </a:p>
-          <a:p>
-            <a:pPr marL="0" indent="0">
-              <a:spcAft>
-                <a:spcPts val="600"/>
-              </a:spcAft>
-              <a:buNone/>
-            </a:pPr>
-            <a:r>
-              <a:rPr lang="en-GB" dirty="0">
-                <a:latin typeface="APL385 Unicode" panose="020B0709000202000203" pitchFamily="49" charset="0"/>
-              </a:rPr>
-              <a:t>      </a:t>
-            </a:r>
-            <a:r>
-              <a:rPr lang="en-GB" dirty="0">
-                <a:solidFill>
-                  <a:srgbClr val="00B050"/>
-                </a:solidFill>
-                <a:latin typeface="APL385 Unicode" panose="020B0709000202000203" pitchFamily="49" charset="0"/>
-              </a:rPr>
-              <a:t>a</a:t>
-            </a:r>
-          </a:p>
-          <a:p>
-            <a:pPr marL="0" indent="0">
-              <a:spcAft>
-                <a:spcPts val="600"/>
-              </a:spcAft>
-              <a:buNone/>
-            </a:pPr>
-            <a:r>
-              <a:rPr lang="en-GB" dirty="0">
-                <a:latin typeface="APL385 Unicode" panose="020B0709000202000203" pitchFamily="49" charset="0"/>
-              </a:rPr>
-              <a:t>42</a:t>
-            </a:r>
-          </a:p>
-          <a:p>
-            <a:pPr marL="0" indent="0">
-              <a:spcAft>
-                <a:spcPts val="600"/>
-              </a:spcAft>
-              <a:buNone/>
-            </a:pPr>
-            <a:r>
-              <a:rPr lang="en-GB" dirty="0">
-                <a:latin typeface="APL385 Unicode" panose="020B0709000202000203" pitchFamily="49" charset="0"/>
-              </a:rPr>
-              <a:t>      </a:t>
-            </a:r>
-            <a:r>
-              <a:rPr lang="en-GB" dirty="0">
-                <a:solidFill>
-                  <a:srgbClr val="00B050"/>
-                </a:solidFill>
-                <a:latin typeface="APL385 Unicode" panose="020B0709000202000203" pitchFamily="49" charset="0"/>
-              </a:rPr>
-              <a:t>b</a:t>
-            </a:r>
-          </a:p>
-          <a:p>
-            <a:pPr marL="0" indent="0">
-              <a:spcAft>
-                <a:spcPts val="600"/>
-              </a:spcAft>
-              <a:buNone/>
-            </a:pPr>
-            <a:r>
-              <a:rPr lang="en-GB" dirty="0">
-                <a:latin typeface="APL385 Unicode" panose="020B0709000202000203" pitchFamily="49" charset="0"/>
-              </a:rPr>
-              <a:t>1 2 3</a:t>
-            </a:r>
-          </a:p>
-          <a:p>
-            <a:pPr marL="0" indent="0">
-              <a:spcAft>
-                <a:spcPts val="600"/>
-              </a:spcAft>
-              <a:buNone/>
-            </a:pPr>
-            <a:r>
-              <a:rPr lang="en-GB" dirty="0">
-                <a:latin typeface="APL385 Unicode" panose="020B0709000202000203" pitchFamily="49" charset="0"/>
-              </a:rPr>
-              <a:t>4 1 2</a:t>
-            </a:r>
-          </a:p>
-          <a:p>
-            <a:pPr marL="0" indent="0">
-              <a:spcAft>
-                <a:spcPts val="600"/>
-              </a:spcAft>
-              <a:buNone/>
-            </a:pPr>
-            <a:r>
-              <a:rPr lang="en-GB" dirty="0">
-                <a:latin typeface="APL385 Unicode" panose="020B0709000202000203" pitchFamily="49" charset="0"/>
-              </a:rPr>
-              <a:t>      </a:t>
-            </a:r>
-            <a:r>
-              <a:rPr lang="en-GB" dirty="0">
-                <a:solidFill>
-                  <a:srgbClr val="00B050"/>
-                </a:solidFill>
-                <a:latin typeface="APL385 Unicode" panose="020B0709000202000203" pitchFamily="49" charset="0"/>
-              </a:rPr>
-              <a:t>c</a:t>
-            </a:r>
-          </a:p>
-          <a:p>
-            <a:pPr marL="0" indent="0">
-              <a:spcAft>
-                <a:spcPts val="600"/>
-              </a:spcAft>
-              <a:buNone/>
-            </a:pPr>
-            <a:r>
-              <a:rPr lang="en-GB" dirty="0">
-                <a:latin typeface="APL385 Unicode" panose="020B0709000202000203" pitchFamily="49" charset="0"/>
-              </a:rPr>
-              <a:t>a string</a:t>
-            </a:r>
-          </a:p>
-        </p:txBody>
-      </p:sp>
-      <p:sp>
-        <p:nvSpPr>
-          <p:cNvPr id="3" name="Title 2">
-            <a:extLst>
-              <a:ext uri="{FF2B5EF4-FFF2-40B4-BE49-F238E27FC236}">
-                <a16:creationId xmlns:a16="http://schemas.microsoft.com/office/drawing/2014/main" id="{ACE32ADB-4F74-0B04-4B4C-9651683F57CC}"/>
-              </a:ext>
-            </a:extLst>
-          </p:cNvPr>
-          <p:cNvSpPr>
-            <a:spLocks noGrp="1"/>
-          </p:cNvSpPr>
-          <p:nvPr>
-            <p:ph type="title"/>
-          </p:nvPr>
-        </p:nvSpPr>
-        <p:spPr/>
-        <p:txBody>
-          <a:bodyPr/>
-          <a:lstStyle/>
-          <a:p>
-            <a:r>
-              <a:rPr lang="en-GB" dirty="0"/>
-              <a:t>Strand Assignment</a:t>
-            </a:r>
-          </a:p>
-        </p:txBody>
-      </p:sp>
-      <p:sp>
-        <p:nvSpPr>
-          <p:cNvPr id="4" name="Media Placeholder 3">
-            <a:extLst>
-              <a:ext uri="{FF2B5EF4-FFF2-40B4-BE49-F238E27FC236}">
-                <a16:creationId xmlns:a16="http://schemas.microsoft.com/office/drawing/2014/main" id="{200F3CA6-487D-10AB-BCF5-C2162DE7FF0C}"/>
-              </a:ext>
-            </a:extLst>
-          </p:cNvPr>
-          <p:cNvSpPr>
-            <a:spLocks noGrp="1"/>
-          </p:cNvSpPr>
-          <p:nvPr>
-            <p:ph type="media" sz="quarter" idx="11"/>
-          </p:nvPr>
-        </p:nvSpPr>
-        <p:spPr/>
-        <p:txBody>
-          <a:bodyPr/>
-          <a:lstStyle/>
-          <a:p>
-            <a:endParaRPr lang="en-GB"/>
-          </a:p>
-        </p:txBody>
-      </p:sp>
-    </p:spTree>
-    <p:extLst>
-      <p:ext uri="{BB962C8B-B14F-4D97-AF65-F5344CB8AC3E}">
-        <p14:creationId xmlns:p14="http://schemas.microsoft.com/office/powerpoint/2010/main" val="1527952990"/>
-      </p:ext>
-    </p:extLst>
-  </p:cSld>
-  <p:clrMapOvr>
-    <a:masterClrMapping/>
-  </p:clrMapOvr>
-</p:sld>
-</file>
-
 <file path=ppt/slides/slide112.xml><?xml version="1.0" encoding="utf-8"?>
 <p:sld xmlns:a="http://schemas.openxmlformats.org/drawingml/2006/main" xmlns:r="http://schemas.openxmlformats.org/officeDocument/2006/relationships" xmlns:p="http://schemas.openxmlformats.org/presentationml/2006/main">
   <p:cSld>
@@ -7580,6 +7783,270 @@
           <p:cNvPr id="2" name="Content Placeholder 1">
             <a:extLst>
               <a:ext uri="{FF2B5EF4-FFF2-40B4-BE49-F238E27FC236}">
+                <a16:creationId xmlns:a16="http://schemas.microsoft.com/office/drawing/2014/main" id="{0A40213B-B61B-FD7A-5358-5A1C2C6CB1F5}"/>
+              </a:ext>
+            </a:extLst>
+          </p:cNvPr>
+          <p:cNvSpPr>
+            <a:spLocks noGrp="1"/>
+          </p:cNvSpPr>
+          <p:nvPr>
+            <p:ph idx="1"/>
+          </p:nvPr>
+        </p:nvSpPr>
+        <p:spPr/>
+        <p:txBody>
+          <a:bodyPr>
+            <a:normAutofit fontScale="85000" lnSpcReduction="20000"/>
+          </a:bodyPr>
+          <a:lstStyle/>
+          <a:p>
+            <a:pPr marL="0" indent="0">
+              <a:buNone/>
+            </a:pPr>
+            <a:r>
+              <a:rPr lang="en-GB" dirty="0"/>
+              <a:t>Assign to multiple names at once</a:t>
+            </a:r>
+          </a:p>
+          <a:p>
+            <a:pPr marL="0" indent="0">
+              <a:spcAft>
+                <a:spcPts val="600"/>
+              </a:spcAft>
+              <a:buNone/>
+            </a:pPr>
+            <a:r>
+              <a:rPr lang="en-GB" dirty="0">
+                <a:latin typeface="APL385 Unicode" panose="020B0709000202000203" pitchFamily="49" charset="0"/>
+              </a:rPr>
+              <a:t>      </a:t>
+            </a:r>
+            <a:r>
+              <a:rPr lang="en-GB" dirty="0">
+                <a:solidFill>
+                  <a:srgbClr val="00B050"/>
+                </a:solidFill>
+                <a:latin typeface="APL385 Unicode" panose="020B0709000202000203" pitchFamily="49" charset="0"/>
+              </a:rPr>
+              <a:t>(a b c)←42 (2 3⍴⍳4) 'a string'</a:t>
+            </a:r>
+          </a:p>
+          <a:p>
+            <a:pPr marL="0" indent="0">
+              <a:spcAft>
+                <a:spcPts val="600"/>
+              </a:spcAft>
+              <a:buNone/>
+            </a:pPr>
+            <a:r>
+              <a:rPr lang="en-GB" dirty="0">
+                <a:latin typeface="APL385 Unicode" panose="020B0709000202000203" pitchFamily="49" charset="0"/>
+              </a:rPr>
+              <a:t>      </a:t>
+            </a:r>
+            <a:r>
+              <a:rPr lang="en-GB" dirty="0">
+                <a:solidFill>
+                  <a:srgbClr val="00B050"/>
+                </a:solidFill>
+                <a:latin typeface="APL385 Unicode" panose="020B0709000202000203" pitchFamily="49" charset="0"/>
+              </a:rPr>
+              <a:t>a</a:t>
+            </a:r>
+          </a:p>
+          <a:p>
+            <a:pPr marL="0" indent="0">
+              <a:spcAft>
+                <a:spcPts val="600"/>
+              </a:spcAft>
+              <a:buNone/>
+            </a:pPr>
+            <a:r>
+              <a:rPr lang="en-GB" dirty="0">
+                <a:latin typeface="APL385 Unicode" panose="020B0709000202000203" pitchFamily="49" charset="0"/>
+              </a:rPr>
+              <a:t>42</a:t>
+            </a:r>
+          </a:p>
+          <a:p>
+            <a:pPr marL="0" indent="0">
+              <a:spcAft>
+                <a:spcPts val="600"/>
+              </a:spcAft>
+              <a:buNone/>
+            </a:pPr>
+            <a:r>
+              <a:rPr lang="en-GB" dirty="0">
+                <a:latin typeface="APL385 Unicode" panose="020B0709000202000203" pitchFamily="49" charset="0"/>
+              </a:rPr>
+              <a:t>      </a:t>
+            </a:r>
+            <a:r>
+              <a:rPr lang="en-GB" dirty="0">
+                <a:solidFill>
+                  <a:srgbClr val="00B050"/>
+                </a:solidFill>
+                <a:latin typeface="APL385 Unicode" panose="020B0709000202000203" pitchFamily="49" charset="0"/>
+              </a:rPr>
+              <a:t>b</a:t>
+            </a:r>
+          </a:p>
+          <a:p>
+            <a:pPr marL="0" indent="0">
+              <a:spcAft>
+                <a:spcPts val="600"/>
+              </a:spcAft>
+              <a:buNone/>
+            </a:pPr>
+            <a:r>
+              <a:rPr lang="en-GB" dirty="0">
+                <a:latin typeface="APL385 Unicode" panose="020B0709000202000203" pitchFamily="49" charset="0"/>
+              </a:rPr>
+              <a:t>1 2 3</a:t>
+            </a:r>
+          </a:p>
+          <a:p>
+            <a:pPr marL="0" indent="0">
+              <a:spcAft>
+                <a:spcPts val="600"/>
+              </a:spcAft>
+              <a:buNone/>
+            </a:pPr>
+            <a:r>
+              <a:rPr lang="en-GB" dirty="0">
+                <a:latin typeface="APL385 Unicode" panose="020B0709000202000203" pitchFamily="49" charset="0"/>
+              </a:rPr>
+              <a:t>4 1 2</a:t>
+            </a:r>
+          </a:p>
+          <a:p>
+            <a:pPr marL="0" indent="0">
+              <a:spcAft>
+                <a:spcPts val="600"/>
+              </a:spcAft>
+              <a:buNone/>
+            </a:pPr>
+            <a:r>
+              <a:rPr lang="en-GB" dirty="0">
+                <a:latin typeface="APL385 Unicode" panose="020B0709000202000203" pitchFamily="49" charset="0"/>
+              </a:rPr>
+              <a:t>      </a:t>
+            </a:r>
+            <a:r>
+              <a:rPr lang="en-GB" dirty="0">
+                <a:solidFill>
+                  <a:srgbClr val="00B050"/>
+                </a:solidFill>
+                <a:latin typeface="APL385 Unicode" panose="020B0709000202000203" pitchFamily="49" charset="0"/>
+              </a:rPr>
+              <a:t>c</a:t>
+            </a:r>
+          </a:p>
+          <a:p>
+            <a:pPr marL="0" indent="0">
+              <a:spcAft>
+                <a:spcPts val="600"/>
+              </a:spcAft>
+              <a:buNone/>
+            </a:pPr>
+            <a:r>
+              <a:rPr lang="en-GB" dirty="0">
+                <a:latin typeface="APL385 Unicode" panose="020B0709000202000203" pitchFamily="49" charset="0"/>
+              </a:rPr>
+              <a:t>a string</a:t>
+            </a:r>
+          </a:p>
+        </p:txBody>
+      </p:sp>
+      <p:sp>
+        <p:nvSpPr>
+          <p:cNvPr id="3" name="Title 2">
+            <a:extLst>
+              <a:ext uri="{FF2B5EF4-FFF2-40B4-BE49-F238E27FC236}">
+                <a16:creationId xmlns:a16="http://schemas.microsoft.com/office/drawing/2014/main" id="{ACE32ADB-4F74-0B04-4B4C-9651683F57CC}"/>
+              </a:ext>
+            </a:extLst>
+          </p:cNvPr>
+          <p:cNvSpPr>
+            <a:spLocks noGrp="1"/>
+          </p:cNvSpPr>
+          <p:nvPr>
+            <p:ph type="title"/>
+          </p:nvPr>
+        </p:nvSpPr>
+        <p:spPr/>
+        <p:txBody>
+          <a:bodyPr/>
+          <a:lstStyle/>
+          <a:p>
+            <a:r>
+              <a:rPr lang="en-GB" dirty="0"/>
+              <a:t>Strand Assignment</a:t>
+            </a:r>
+          </a:p>
+        </p:txBody>
+      </p:sp>
+      <p:sp>
+        <p:nvSpPr>
+          <p:cNvPr id="4" name="Media Placeholder 3">
+            <a:extLst>
+              <a:ext uri="{FF2B5EF4-FFF2-40B4-BE49-F238E27FC236}">
+                <a16:creationId xmlns:a16="http://schemas.microsoft.com/office/drawing/2014/main" id="{200F3CA6-487D-10AB-BCF5-C2162DE7FF0C}"/>
+              </a:ext>
+            </a:extLst>
+          </p:cNvPr>
+          <p:cNvSpPr>
+            <a:spLocks noGrp="1"/>
+          </p:cNvSpPr>
+          <p:nvPr>
+            <p:ph type="media" sz="quarter" idx="11"/>
+          </p:nvPr>
+        </p:nvSpPr>
+        <p:spPr/>
+        <p:txBody>
+          <a:bodyPr/>
+          <a:lstStyle/>
+          <a:p>
+            <a:endParaRPr lang="en-GB"/>
+          </a:p>
+        </p:txBody>
+      </p:sp>
+    </p:spTree>
+    <p:extLst>
+      <p:ext uri="{BB962C8B-B14F-4D97-AF65-F5344CB8AC3E}">
+        <p14:creationId xmlns:p14="http://schemas.microsoft.com/office/powerpoint/2010/main" val="1527952990"/>
+      </p:ext>
+    </p:extLst>
+  </p:cSld>
+  <p:clrMapOvr>
+    <a:masterClrMapping/>
+  </p:clrMapOvr>
+</p:sld>
+</file>
+
+<file path=ppt/slides/slide113.xml><?xml version="1.0" encoding="utf-8"?>
+<p:sld xmlns:a="http://schemas.openxmlformats.org/drawingml/2006/main" xmlns:r="http://schemas.openxmlformats.org/officeDocument/2006/relationships" xmlns:p="http://schemas.openxmlformats.org/presentationml/2006/main">
+  <p:cSld>
+    <p:spTree>
+      <p:nvGrpSpPr>
+        <p:cNvPr id="1" name=""/>
+        <p:cNvGrpSpPr/>
+        <p:nvPr/>
+      </p:nvGrpSpPr>
+      <p:grpSpPr>
+        <a:xfrm>
+          <a:off x="0" y="0"/>
+          <a:ext cx="0" cy="0"/>
+          <a:chOff x="0" y="0"/>
+          <a:chExt cx="0" cy="0"/>
+        </a:xfrm>
+      </p:grpSpPr>
+      <p:sp>
+        <p:nvSpPr>
+          <p:cNvPr id="2" name="Content Placeholder 1">
+            <a:extLst>
+              <a:ext uri="{FF2B5EF4-FFF2-40B4-BE49-F238E27FC236}">
                 <a16:creationId xmlns:a16="http://schemas.microsoft.com/office/drawing/2014/main" id="{15B8772A-4771-511D-329A-7022C9D5DCCF}"/>
               </a:ext>
             </a:extLst>
@@ -7845,7 +8312,7 @@
 </p:sld>
 </file>
 
-<file path=ppt/slides/slide113.xml><?xml version="1.0" encoding="utf-8"?>
+<file path=ppt/slides/slide114.xml><?xml version="1.0" encoding="utf-8"?>
 <p:sld xmlns:a="http://schemas.openxmlformats.org/drawingml/2006/main" xmlns:r="http://schemas.openxmlformats.org/officeDocument/2006/relationships" xmlns:p="http://schemas.openxmlformats.org/presentationml/2006/main">
   <p:cSld>
     <p:spTree>
@@ -8077,7 +8544,7 @@
 </p:sld>
 </file>
 
-<file path=ppt/slides/slide114.xml><?xml version="1.0" encoding="utf-8"?>
+<file path=ppt/slides/slide115.xml><?xml version="1.0" encoding="utf-8"?>
 <p:sld xmlns:a="http://schemas.openxmlformats.org/drawingml/2006/main" xmlns:r="http://schemas.openxmlformats.org/officeDocument/2006/relationships" xmlns:p="http://schemas.openxmlformats.org/presentationml/2006/main">
   <p:cSld>
     <p:spTree>
@@ -8546,7 +9013,7 @@
 </p:sld>
 </file>
 
-<file path=ppt/slides/slide115.xml><?xml version="1.0" encoding="utf-8"?>
+<file path=ppt/slides/slide116.xml><?xml version="1.0" encoding="utf-8"?>
 <p:sld xmlns:a="http://schemas.openxmlformats.org/drawingml/2006/main" xmlns:r="http://schemas.openxmlformats.org/officeDocument/2006/relationships" xmlns:p="http://schemas.openxmlformats.org/presentationml/2006/main">
   <p:cSld>
     <p:spTree>
@@ -8929,7 +9396,7 @@
 </p:sld>
 </file>
 
-<file path=ppt/slides/slide116.xml><?xml version="1.0" encoding="utf-8"?>
+<file path=ppt/slides/slide117.xml><?xml version="1.0" encoding="utf-8"?>
 <p:sld xmlns:a="http://schemas.openxmlformats.org/drawingml/2006/main" xmlns:r="http://schemas.openxmlformats.org/officeDocument/2006/relationships" xmlns:p="http://schemas.openxmlformats.org/presentationml/2006/main">
   <p:cSld>
     <p:spTree>
@@ -9050,7 +9517,7 @@
 </p:sld>
 </file>
 
-<file path=ppt/slides/slide117.xml><?xml version="1.0" encoding="utf-8"?>
+<file path=ppt/slides/slide118.xml><?xml version="1.0" encoding="utf-8"?>
 <p:sld xmlns:a="http://schemas.openxmlformats.org/drawingml/2006/main" xmlns:r="http://schemas.openxmlformats.org/officeDocument/2006/relationships" xmlns:p="http://schemas.openxmlformats.org/presentationml/2006/main">
   <p:cSld>
     <p:spTree>
@@ -46827,7 +47294,9 @@
         </p:nvSpPr>
         <p:spPr/>
         <p:txBody>
-          <a:bodyPr/>
+          <a:bodyPr>
+            <a:normAutofit fontScale="85000" lnSpcReduction="20000"/>
+          </a:bodyPr>
           <a:lstStyle/>
           <a:p>
             <a:pPr marL="0" indent="0">
@@ -46840,7 +47309,21 @@
                 </a:solidFill>
                 <a:latin typeface="APL385 Unicode" panose="020B0709000202000203" pitchFamily="49" charset="0"/>
               </a:rPr>
-              <a:t>      </a:t>
+              <a:t>      s←'switch it'</a:t>
+            </a:r>
+          </a:p>
+          <a:p>
+            <a:pPr marL="0" indent="0">
+              <a:buNone/>
+            </a:pPr>
+            <a:r>
+              <a:rPr lang="en-GB" dirty="0">
+                <a:solidFill>
+                  <a:srgbClr val="00B050"/>
+                </a:solidFill>
+                <a:latin typeface="APL385 Unicode" panose="020B0709000202000203" pitchFamily="49" charset="0"/>
+              </a:rPr>
+              <a:t>      'IT*'['</a:t>
             </a:r>
             <a:r>
               <a:rPr lang="en-GB" dirty="0" err="1">
@@ -46849,7 +47332,7 @@
                 </a:solidFill>
                 <a:latin typeface="APL385 Unicode" panose="020B0709000202000203" pitchFamily="49" charset="0"/>
               </a:rPr>
-              <a:t>s←'switch</a:t>
+              <a:t>it'⍳s</a:t>
             </a:r>
             <a:r>
               <a:rPr lang="en-GB" dirty="0">
@@ -46858,7 +47341,35 @@
                 </a:solidFill>
                 <a:latin typeface="APL385 Unicode" panose="020B0709000202000203" pitchFamily="49" charset="0"/>
               </a:rPr>
-              <a:t> </a:t>
+              <a:t>]</a:t>
+            </a:r>
+          </a:p>
+          <a:p>
+            <a:pPr marL="0" indent="0">
+              <a:buNone/>
+            </a:pPr>
+            <a:r>
+              <a:rPr lang="en-GB" dirty="0">
+                <a:solidFill>
+                  <a:schemeClr val="tx1"/>
+                </a:solidFill>
+                <a:latin typeface="APL385 Unicode" panose="020B0709000202000203" pitchFamily="49" charset="0"/>
+              </a:rPr>
+              <a:t>**IT***IT</a:t>
+            </a:r>
+          </a:p>
+          <a:p>
+            <a:pPr marL="0" indent="0">
+              <a:buNone/>
+            </a:pPr>
+            <a:r>
+              <a:rPr lang="en-GB" dirty="0">
+                <a:solidFill>
+                  <a:srgbClr val="00B050"/>
+                </a:solidFill>
+                <a:latin typeface="APL385 Unicode" panose="020B0709000202000203" pitchFamily="49" charset="0"/>
+              </a:rPr>
+              <a:t>      ('!',s)[('</a:t>
             </a:r>
             <a:r>
               <a:rPr lang="en-GB" dirty="0" err="1">
@@ -46876,56 +47387,30 @@
                 </a:solidFill>
                 <a:latin typeface="APL385 Unicode" panose="020B0709000202000203" pitchFamily="49" charset="0"/>
               </a:rPr>
-              <a:t>'</a:t>
-            </a:r>
-          </a:p>
-          <a:p>
-            <a:pPr marL="0" indent="0">
-              <a:buNone/>
-            </a:pPr>
-            <a:r>
-              <a:rPr lang="en-GB" dirty="0">
-                <a:solidFill>
-                  <a:srgbClr val="00B050"/>
-                </a:solidFill>
-                <a:latin typeface="APL385 Unicode" panose="020B0709000202000203" pitchFamily="49" charset="0"/>
-              </a:rPr>
-              <a:t>      ('!',s)[('</a:t>
-            </a:r>
+              <a:t>',s)⍳s]</a:t>
+            </a:r>
+          </a:p>
+          <a:p>
+            <a:pPr marL="0" indent="0">
+              <a:buNone/>
+            </a:pPr>
             <a:r>
               <a:rPr lang="en-GB" dirty="0" err="1">
                 <a:solidFill>
-                  <a:srgbClr val="00B050"/>
-                </a:solidFill>
-                <a:latin typeface="APL385 Unicode" panose="020B0709000202000203" pitchFamily="49" charset="0"/>
-              </a:rPr>
-              <a:t>i</a:t>
-            </a:r>
-            <a:r>
-              <a:rPr lang="en-GB" dirty="0">
-                <a:solidFill>
-                  <a:srgbClr val="00B050"/>
-                </a:solidFill>
-                <a:latin typeface="APL385 Unicode" panose="020B0709000202000203" pitchFamily="49" charset="0"/>
-              </a:rPr>
-              <a:t>',s)⍳s]</a:t>
-            </a:r>
-          </a:p>
-          <a:p>
-            <a:pPr marL="0" indent="0">
-              <a:buNone/>
-            </a:pPr>
-            <a:r>
-              <a:rPr lang="en-GB" dirty="0" err="1">
+                  <a:schemeClr val="tx1"/>
+                </a:solidFill>
                 <a:latin typeface="APL385 Unicode" panose="020B0709000202000203" pitchFamily="49" charset="0"/>
               </a:rPr>
               <a:t>sw!tch</a:t>
             </a:r>
             <a:r>
               <a:rPr lang="en-GB" dirty="0">
-                <a:latin typeface="APL385 Unicode" panose="020B0709000202000203" pitchFamily="49" charset="0"/>
-              </a:rPr>
-              <a:t> !</a:t>
+                <a:solidFill>
+                  <a:schemeClr val="tx1"/>
+                </a:solidFill>
+                <a:latin typeface="APL385 Unicode" panose="020B0709000202000203" pitchFamily="49" charset="0"/>
+              </a:rPr>
+              <a:t> !t</a:t>
             </a:r>
           </a:p>
           <a:p>
@@ -47144,7 +47629,7 @@
                                         <p:tgtEl>
                                           <p:spTgt spid="2">
                                             <p:txEl>
-                                              <p:pRg st="3" end="3"/>
+                                              <p:pRg st="1" end="1"/>
                                             </p:txEl>
                                           </p:spTgt>
                                         </p:tgtEl>
@@ -47175,6 +47660,86 @@
                                         <p:tgtEl>
                                           <p:spTgt spid="2">
                                             <p:txEl>
+                                              <p:pRg st="2" end="2"/>
+                                            </p:txEl>
+                                          </p:spTgt>
+                                        </p:tgtEl>
+                                        <p:attrNameLst>
+                                          <p:attrName>style.visibility</p:attrName>
+                                        </p:attrNameLst>
+                                      </p:cBhvr>
+                                      <p:to>
+                                        <p:strVal val="visible"/>
+                                      </p:to>
+                                    </p:set>
+                                  </p:childTnLst>
+                                </p:cTn>
+                              </p:par>
+                            </p:childTnLst>
+                          </p:cTn>
+                        </p:par>
+                      </p:childTnLst>
+                    </p:cTn>
+                  </p:par>
+                  <p:par>
+                    <p:cTn id="9" fill="hold">
+                      <p:stCondLst>
+                        <p:cond delay="indefinite"/>
+                      </p:stCondLst>
+                      <p:childTnLst>
+                        <p:par>
+                          <p:cTn id="10" fill="hold">
+                            <p:stCondLst>
+                              <p:cond delay="0"/>
+                            </p:stCondLst>
+                            <p:childTnLst>
+                              <p:par>
+                                <p:cTn id="11" presetID="1" presetClass="entr" presetSubtype="0" fill="hold" nodeType="clickEffect">
+                                  <p:stCondLst>
+                                    <p:cond delay="0"/>
+                                  </p:stCondLst>
+                                  <p:childTnLst>
+                                    <p:set>
+                                      <p:cBhvr>
+                                        <p:cTn id="12" dur="1" fill="hold">
+                                          <p:stCondLst>
+                                            <p:cond delay="0"/>
+                                          </p:stCondLst>
+                                        </p:cTn>
+                                        <p:tgtEl>
+                                          <p:spTgt spid="2">
+                                            <p:txEl>
+                                              <p:pRg st="3" end="3"/>
+                                            </p:txEl>
+                                          </p:spTgt>
+                                        </p:tgtEl>
+                                        <p:attrNameLst>
+                                          <p:attrName>style.visibility</p:attrName>
+                                        </p:attrNameLst>
+                                      </p:cBhvr>
+                                      <p:to>
+                                        <p:strVal val="visible"/>
+                                      </p:to>
+                                    </p:set>
+                                  </p:childTnLst>
+                                </p:cTn>
+                              </p:par>
+                              <p:par>
+                                <p:cTn id="13" presetID="1" presetClass="entr" presetSubtype="0" fill="hold" nodeType="withEffect">
+                                  <p:stCondLst>
+                                    <p:cond delay="0"/>
+                                  </p:stCondLst>
+                                  <p:childTnLst>
+                                    <p:set>
+                                      <p:cBhvr>
+                                        <p:cTn id="14" dur="1" fill="hold">
+                                          <p:stCondLst>
+                                            <p:cond delay="0"/>
+                                          </p:stCondLst>
+                                        </p:cTn>
+                                        <p:tgtEl>
+                                          <p:spTgt spid="2">
+                                            <p:txEl>
                                               <p:pRg st="4" end="4"/>
                                             </p:txEl>
                                           </p:spTgt>
@@ -47190,15 +47755,33 @@
                                   </p:childTnLst>
                                 </p:cTn>
                               </p:par>
+                            </p:childTnLst>
+                          </p:cTn>
+                        </p:par>
+                      </p:childTnLst>
+                    </p:cTn>
+                  </p:par>
+                  <p:par>
+                    <p:cTn id="15" fill="hold">
+                      <p:stCondLst>
+                        <p:cond delay="indefinite"/>
+                      </p:stCondLst>
+                      <p:childTnLst>
+                        <p:par>
+                          <p:cTn id="16" fill="hold">
+                            <p:stCondLst>
+                              <p:cond delay="0"/>
+                            </p:stCondLst>
+                            <p:childTnLst>
                               <p:par>
-                                <p:cTn id="9" presetID="1" presetClass="entr" presetSubtype="0" fill="hold" nodeType="withEffect">
+                                <p:cTn id="17" presetID="1" presetClass="entr" presetSubtype="0" fill="hold" nodeType="clickEffect">
                                   <p:stCondLst>
                                     <p:cond delay="0"/>
                                   </p:stCondLst>
                                   <p:childTnLst>
                                     <p:set>
                                       <p:cBhvr>
-                                        <p:cTn id="10" dur="1" fill="hold">
+                                        <p:cTn id="18" dur="1" fill="hold">
                                           <p:stCondLst>
                                             <p:cond delay="0"/>
                                           </p:stCondLst>
@@ -47207,6 +47790,68 @@
                                           <p:spTgt spid="2">
                                             <p:txEl>
                                               <p:pRg st="5" end="5"/>
+                                            </p:txEl>
+                                          </p:spTgt>
+                                        </p:tgtEl>
+                                        <p:attrNameLst>
+                                          <p:attrName>style.visibility</p:attrName>
+                                        </p:attrNameLst>
+                                      </p:cBhvr>
+                                      <p:to>
+                                        <p:strVal val="visible"/>
+                                      </p:to>
+                                    </p:set>
+                                  </p:childTnLst>
+                                </p:cTn>
+                              </p:par>
+                              <p:par>
+                                <p:cTn id="19" presetID="1" presetClass="entr" presetSubtype="0" fill="hold" nodeType="withEffect">
+                                  <p:stCondLst>
+                                    <p:cond delay="0"/>
+                                  </p:stCondLst>
+                                  <p:childTnLst>
+                                    <p:set>
+                                      <p:cBhvr>
+                                        <p:cTn id="20" dur="1" fill="hold">
+                                          <p:stCondLst>
+                                            <p:cond delay="0"/>
+                                          </p:stCondLst>
+                                        </p:cTn>
+                                        <p:tgtEl>
+                                          <p:spTgt spid="2">
+                                            <p:txEl>
+                                              <p:pRg st="6" end="6"/>
+                                            </p:txEl>
+                                          </p:spTgt>
+                                        </p:tgtEl>
+                                        <p:attrNameLst>
+                                          <p:attrName>style.visibility</p:attrName>
+                                        </p:attrNameLst>
+                                      </p:cBhvr>
+                                      <p:to>
+                                        <p:strVal val="visible"/>
+                                      </p:to>
+                                    </p:set>
+                                  </p:childTnLst>
+                                </p:cTn>
+                              </p:par>
+                              <p:par>
+                                <p:cTn id="21" presetID="1" presetClass="entr" presetSubtype="0" fill="hold" nodeType="withEffect">
+                                  <p:stCondLst>
+                                    <p:cond delay="0"/>
+                                  </p:stCondLst>
+                                  <p:childTnLst>
+                                    <p:set>
+                                      <p:cBhvr>
+                                        <p:cTn id="22" dur="1" fill="hold">
+                                          <p:stCondLst>
+                                            <p:cond delay="0"/>
+                                          </p:stCondLst>
+                                        </p:cTn>
+                                        <p:tgtEl>
+                                          <p:spTgt spid="2">
+                                            <p:txEl>
+                                              <p:pRg st="7" end="7"/>
                                             </p:txEl>
                                           </p:spTgt>
                                         </p:tgtEl>

--- a/slides/APL_Bootcamp-part-5.pptx
+++ b/slides/APL_Bootcamp-part-5.pptx
@@ -363,7 +363,7 @@
               <a:rPr lang="en-GB" smtClean="0">
                 <a:latin typeface="Sarabun" panose="00000500000000000000" pitchFamily="2" charset="-34"/>
               </a:rPr>
-              <a:t>20/08/2025</a:t>
+              <a:t>28/08/2025</a:t>
             </a:fld>
             <a:endParaRPr lang="en-GB" dirty="0">
               <a:latin typeface="Sarabun" panose="00000500000000000000" pitchFamily="2" charset="-34"/>
@@ -541,7 +541,7 @@
             <a:fld id="{CDEAEF8A-5BB8-41C8-B8C2-160617C17EF4}" type="datetimeFigureOut">
               <a:rPr lang="en-GB" smtClean="0"/>
               <a:pPr/>
-              <a:t>20/08/2025</a:t>
+              <a:t>28/08/2025</a:t>
             </a:fld>
             <a:endParaRPr lang="en-GB" dirty="0"/>
           </a:p>
@@ -20385,26 +20385,39 @@
                                   </p:childTnLst>
                                 </p:cTn>
                               </p:par>
-                            </p:childTnLst>
-                          </p:cTn>
-                        </p:par>
-                      </p:childTnLst>
-                    </p:cTn>
-                  </p:par>
-                  <p:par>
-                    <p:cTn id="7" fill="hold">
-                      <p:stCondLst>
-                        <p:cond delay="indefinite"/>
-                      </p:stCondLst>
-                      <p:childTnLst>
-                        <p:par>
-                          <p:cTn id="8" fill="hold">
-                            <p:stCondLst>
-                              <p:cond delay="0"/>
-                            </p:stCondLst>
-                            <p:childTnLst>
                               <p:par>
-                                <p:cTn id="9" presetID="1" presetClass="entr" presetSubtype="0" fill="hold" nodeType="clickEffect">
+                                <p:cTn id="7" presetID="1" presetClass="entr" presetSubtype="0" fill="hold" nodeType="withEffect">
+                                  <p:stCondLst>
+                                    <p:cond delay="0"/>
+                                  </p:stCondLst>
+                                  <p:childTnLst>
+                                    <p:set>
+                                      <p:cBhvr>
+                                        <p:cTn id="8" dur="1" fill="hold">
+                                          <p:stCondLst>
+                                            <p:cond delay="0"/>
+                                          </p:stCondLst>
+                                        </p:cTn>
+                                        <p:tgtEl>
+                                          <p:spTgt spid="2">
+                                            <p:txEl>
+                                              <p:pRg st="3" end="3"/>
+                                            </p:txEl>
+                                          </p:spTgt>
+                                        </p:tgtEl>
+                                        <p:attrNameLst>
+                                          <p:attrName>style.visibility</p:attrName>
+                                        </p:attrNameLst>
+                                      </p:cBhvr>
+                                      <p:to>
+                                        <p:strVal val="visible"/>
+                                      </p:to>
+                                    </p:set>
+                                  </p:childTnLst>
+                                </p:cTn>
+                              </p:par>
+                              <p:par>
+                                <p:cTn id="9" presetID="1" presetClass="entr" presetSubtype="0" fill="hold" nodeType="withEffect">
                                   <p:stCondLst>
                                     <p:cond delay="0"/>
                                   </p:stCondLst>
@@ -20419,7 +20432,7 @@
                                         <p:tgtEl>
                                           <p:spTgt spid="2">
                                             <p:txEl>
-                                              <p:pRg st="3" end="3"/>
+                                              <p:pRg st="4" end="4"/>
                                             </p:txEl>
                                           </p:spTgt>
                                         </p:tgtEl>
@@ -20450,7 +20463,7 @@
                                         <p:tgtEl>
                                           <p:spTgt spid="2">
                                             <p:txEl>
-                                              <p:pRg st="4" end="4"/>
+                                              <p:pRg st="5" end="5"/>
                                             </p:txEl>
                                           </p:spTgt>
                                         </p:tgtEl>
@@ -20481,7 +20494,7 @@
                                         <p:tgtEl>
                                           <p:spTgt spid="2">
                                             <p:txEl>
-                                              <p:pRg st="5" end="5"/>
+                                              <p:pRg st="6" end="6"/>
                                             </p:txEl>
                                           </p:spTgt>
                                         </p:tgtEl>
@@ -20512,7 +20525,7 @@
                                         <p:tgtEl>
                                           <p:spTgt spid="2">
                                             <p:txEl>
-                                              <p:pRg st="6" end="6"/>
+                                              <p:pRg st="7" end="7"/>
                                             </p:txEl>
                                           </p:spTgt>
                                         </p:tgtEl>
@@ -20543,7 +20556,7 @@
                                         <p:tgtEl>
                                           <p:spTgt spid="2">
                                             <p:txEl>
-                                              <p:pRg st="7" end="7"/>
+                                              <p:pRg st="8" end="8"/>
                                             </p:txEl>
                                           </p:spTgt>
                                         </p:tgtEl>
@@ -20574,37 +20587,6 @@
                                         <p:tgtEl>
                                           <p:spTgt spid="2">
                                             <p:txEl>
-                                              <p:pRg st="8" end="8"/>
-                                            </p:txEl>
-                                          </p:spTgt>
-                                        </p:tgtEl>
-                                        <p:attrNameLst>
-                                          <p:attrName>style.visibility</p:attrName>
-                                        </p:attrNameLst>
-                                      </p:cBhvr>
-                                      <p:to>
-                                        <p:strVal val="visible"/>
-                                      </p:to>
-                                    </p:set>
-                                  </p:childTnLst>
-                                </p:cTn>
-                              </p:par>
-                              <p:par>
-                                <p:cTn id="21" presetID="1" presetClass="entr" presetSubtype="0" fill="hold" nodeType="withEffect">
-                                  <p:stCondLst>
-                                    <p:cond delay="0"/>
-                                  </p:stCondLst>
-                                  <p:childTnLst>
-                                    <p:set>
-                                      <p:cBhvr>
-                                        <p:cTn id="22" dur="1" fill="hold">
-                                          <p:stCondLst>
-                                            <p:cond delay="0"/>
-                                          </p:stCondLst>
-                                        </p:cTn>
-                                        <p:tgtEl>
-                                          <p:spTgt spid="2">
-                                            <p:txEl>
                                               <p:pRg st="9" end="9"/>
                                             </p:txEl>
                                           </p:spTgt>
@@ -20627,26 +20609,26 @@
                     </p:cTn>
                   </p:par>
                   <p:par>
-                    <p:cTn id="23" fill="hold">
+                    <p:cTn id="21" fill="hold">
                       <p:stCondLst>
                         <p:cond delay="indefinite"/>
                       </p:stCondLst>
                       <p:childTnLst>
                         <p:par>
-                          <p:cTn id="24" fill="hold">
+                          <p:cTn id="22" fill="hold">
                             <p:stCondLst>
                               <p:cond delay="0"/>
                             </p:stCondLst>
                             <p:childTnLst>
                               <p:par>
-                                <p:cTn id="25" presetID="1" presetClass="entr" presetSubtype="0" fill="hold" nodeType="clickEffect">
+                                <p:cTn id="23" presetID="1" presetClass="entr" presetSubtype="0" fill="hold" nodeType="clickEffect">
                                   <p:stCondLst>
                                     <p:cond delay="0"/>
                                   </p:stCondLst>
                                   <p:childTnLst>
                                     <p:set>
                                       <p:cBhvr>
-                                        <p:cTn id="26" dur="1" fill="hold">
+                                        <p:cTn id="24" dur="1" fill="hold">
                                           <p:stCondLst>
                                             <p:cond delay="0"/>
                                           </p:stCondLst>
@@ -20676,19 +20658,50 @@
                     </p:cTn>
                   </p:par>
                   <p:par>
-                    <p:cTn id="27" fill="hold">
+                    <p:cTn id="25" fill="hold">
                       <p:stCondLst>
                         <p:cond delay="indefinite"/>
                       </p:stCondLst>
                       <p:childTnLst>
                         <p:par>
-                          <p:cTn id="28" fill="hold">
+                          <p:cTn id="26" fill="hold">
                             <p:stCondLst>
                               <p:cond delay="0"/>
                             </p:stCondLst>
                             <p:childTnLst>
                               <p:par>
-                                <p:cTn id="29" presetID="1" presetClass="entr" presetSubtype="0" fill="hold" nodeType="clickEffect">
+                                <p:cTn id="27" presetID="1" presetClass="entr" presetSubtype="0" fill="hold" nodeType="clickEffect">
+                                  <p:stCondLst>
+                                    <p:cond delay="0"/>
+                                  </p:stCondLst>
+                                  <p:childTnLst>
+                                    <p:set>
+                                      <p:cBhvr>
+                                        <p:cTn id="28" dur="1" fill="hold">
+                                          <p:stCondLst>
+                                            <p:cond delay="0"/>
+                                          </p:stCondLst>
+                                        </p:cTn>
+                                        <p:tgtEl>
+                                          <p:spTgt spid="2">
+                                            <p:txEl>
+                                              <p:pRg st="11" end="11"/>
+                                            </p:txEl>
+                                          </p:spTgt>
+                                        </p:tgtEl>
+                                        <p:attrNameLst>
+                                          <p:attrName>style.visibility</p:attrName>
+                                        </p:attrNameLst>
+                                      </p:cBhvr>
+                                      <p:to>
+                                        <p:strVal val="visible"/>
+                                      </p:to>
+                                    </p:set>
+                                  </p:childTnLst>
+                                </p:cTn>
+                              </p:par>
+                              <p:par>
+                                <p:cTn id="29" presetID="1" presetClass="entr" presetSubtype="0" fill="hold" nodeType="withEffect">
                                   <p:stCondLst>
                                     <p:cond delay="0"/>
                                   </p:stCondLst>
@@ -20703,7 +20716,7 @@
                                         <p:tgtEl>
                                           <p:spTgt spid="2">
                                             <p:txEl>
-                                              <p:pRg st="11" end="11"/>
+                                              <p:pRg st="12" end="12"/>
                                             </p:txEl>
                                           </p:spTgt>
                                         </p:tgtEl>
@@ -22254,7 +22267,7 @@
                   <a:schemeClr val="tx1"/>
                 </a:solidFill>
               </a:rPr>
-              <a:t>ing an array removes one level of nesting but increases the rank:</a:t>
+              <a:t>ing also fills with prototypes to make a rectangular shape:</a:t>
             </a:r>
           </a:p>
           <a:p>
